--- a/POO_01.pptx
+++ b/POO_01.pptx
@@ -41,20 +41,32 @@
     <p:sldId id="302" r:id="rId35"/>
     <p:sldId id="303" r:id="rId36"/>
     <p:sldId id="304" r:id="rId37"/>
-    <p:sldId id="293" r:id="rId38"/>
-    <p:sldId id="258" r:id="rId39"/>
-    <p:sldId id="271" r:id="rId40"/>
-    <p:sldId id="272" r:id="rId41"/>
-    <p:sldId id="260" r:id="rId42"/>
-    <p:sldId id="266" r:id="rId43"/>
-    <p:sldId id="268" r:id="rId44"/>
-    <p:sldId id="269" r:id="rId45"/>
-    <p:sldId id="261" r:id="rId46"/>
-    <p:sldId id="262" r:id="rId47"/>
-    <p:sldId id="263" r:id="rId48"/>
-    <p:sldId id="264" r:id="rId49"/>
-    <p:sldId id="265" r:id="rId50"/>
-    <p:sldId id="267" r:id="rId51"/>
+    <p:sldId id="306" r:id="rId38"/>
+    <p:sldId id="307" r:id="rId39"/>
+    <p:sldId id="308" r:id="rId40"/>
+    <p:sldId id="309" r:id="rId41"/>
+    <p:sldId id="310" r:id="rId42"/>
+    <p:sldId id="311" r:id="rId43"/>
+    <p:sldId id="315" r:id="rId44"/>
+    <p:sldId id="316" r:id="rId45"/>
+    <p:sldId id="317" r:id="rId46"/>
+    <p:sldId id="318" r:id="rId47"/>
+    <p:sldId id="319" r:id="rId48"/>
+    <p:sldId id="320" r:id="rId49"/>
+    <p:sldId id="293" r:id="rId50"/>
+    <p:sldId id="258" r:id="rId51"/>
+    <p:sldId id="271" r:id="rId52"/>
+    <p:sldId id="272" r:id="rId53"/>
+    <p:sldId id="260" r:id="rId54"/>
+    <p:sldId id="266" r:id="rId55"/>
+    <p:sldId id="268" r:id="rId56"/>
+    <p:sldId id="269" r:id="rId57"/>
+    <p:sldId id="261" r:id="rId58"/>
+    <p:sldId id="262" r:id="rId59"/>
+    <p:sldId id="263" r:id="rId60"/>
+    <p:sldId id="264" r:id="rId61"/>
+    <p:sldId id="265" r:id="rId62"/>
+    <p:sldId id="267" r:id="rId63"/>
   </p:sldIdLst>
   <p:sldSz cx="12192000" cy="6858000"/>
   <p:notesSz cx="6858000" cy="9144000"/>
@@ -8170,7 +8182,6 @@
               <a:rPr lang="es-CL" dirty="0"/>
               <a:t>20</a:t>
             </a:r>
-            <a:endParaRPr lang="es-CL" dirty="0"/>
           </a:p>
         </p:txBody>
       </p:sp>
@@ -9184,7 +9195,48 @@
           <a:bodyPr/>
           <a:lstStyle/>
           <a:p>
-            <a:endParaRPr lang="es-CL"/>
+            <a:r>
+              <a:rPr lang="es-ES" dirty="0"/>
+              <a:t>Las cinco propiedades fundamentales son:</a:t>
+            </a:r>
+          </a:p>
+          <a:p>
+            <a:pPr lvl="1"/>
+            <a:r>
+              <a:rPr lang="es-ES" dirty="0"/>
+              <a:t>Abstracción </a:t>
+            </a:r>
+          </a:p>
+          <a:p>
+            <a:pPr lvl="1"/>
+            <a:r>
+              <a:rPr lang="es-ES" dirty="0"/>
+              <a:t>Encapsulamiento </a:t>
+            </a:r>
+          </a:p>
+          <a:p>
+            <a:pPr lvl="1"/>
+            <a:r>
+              <a:rPr lang="es-ES" dirty="0"/>
+              <a:t>Herencia </a:t>
+            </a:r>
+          </a:p>
+          <a:p>
+            <a:pPr lvl="1"/>
+            <a:r>
+              <a:rPr lang="es-ES" dirty="0"/>
+              <a:t>Polimorfismo </a:t>
+            </a:r>
+          </a:p>
+          <a:p>
+            <a:pPr lvl="1"/>
+            <a:r>
+              <a:rPr lang="es-ES" dirty="0"/>
+              <a:t>Sobrecarga</a:t>
+            </a:r>
+          </a:p>
+          <a:p>
+            <a:endParaRPr lang="es-CL" dirty="0"/>
           </a:p>
         </p:txBody>
       </p:sp>
@@ -9233,7 +9285,11 @@
           <a:bodyPr/>
           <a:lstStyle/>
           <a:p>
-            <a:endParaRPr lang="es-CL"/>
+            <a:r>
+              <a:rPr lang="es-ES" dirty="0"/>
+              <a:t>Propiedades de la Programación Orientada a Objetos</a:t>
+            </a:r>
+            <a:endParaRPr lang="es-CL" dirty="0"/>
           </a:p>
         </p:txBody>
       </p:sp>
@@ -9249,10 +9305,66 @@
         </p:nvSpPr>
         <p:spPr/>
         <p:txBody>
-          <a:bodyPr/>
+          <a:bodyPr>
+            <a:normAutofit/>
+          </a:bodyPr>
           <a:lstStyle/>
           <a:p>
-            <a:endParaRPr lang="es-CL"/>
+            <a:r>
+              <a:rPr lang="es-ES" b="1" dirty="0"/>
+              <a:t>1. Abstracción</a:t>
+            </a:r>
+          </a:p>
+          <a:p>
+            <a:pPr lvl="1"/>
+            <a:r>
+              <a:rPr lang="es-ES" dirty="0"/>
+              <a:t>La abstracción consiste en mostrar únicamente lo importante y ocultar la complejidad interna.</a:t>
+            </a:r>
+          </a:p>
+          <a:p>
+            <a:r>
+              <a:rPr lang="es-ES" dirty="0"/>
+              <a:t>Ejemplo cotidiano:</a:t>
+            </a:r>
+          </a:p>
+          <a:p>
+            <a:r>
+              <a:rPr lang="es-ES" dirty="0"/>
+              <a:t>Cuando conduces un automóvil solo utilizas:</a:t>
+            </a:r>
+          </a:p>
+          <a:p>
+            <a:pPr lvl="1"/>
+            <a:r>
+              <a:rPr lang="es-ES" dirty="0"/>
+              <a:t>Volante </a:t>
+            </a:r>
+          </a:p>
+          <a:p>
+            <a:pPr lvl="1"/>
+            <a:r>
+              <a:rPr lang="es-ES" dirty="0"/>
+              <a:t>Pedales </a:t>
+            </a:r>
+          </a:p>
+          <a:p>
+            <a:pPr lvl="1"/>
+            <a:r>
+              <a:rPr lang="es-ES" dirty="0"/>
+              <a:t>Palanca de cambios </a:t>
+            </a:r>
+          </a:p>
+          <a:p>
+            <a:r>
+              <a:rPr lang="es-ES" dirty="0"/>
+              <a:t>No necesitas saber cómo funciona el motor internamente</a:t>
+            </a:r>
+            <a:r>
+              <a:rPr lang="es-ES" dirty="0" smtClean="0"/>
+              <a:t>.</a:t>
+            </a:r>
+            <a:endParaRPr lang="es-ES" dirty="0"/>
           </a:p>
         </p:txBody>
       </p:sp>
@@ -9301,7 +9413,11 @@
           <a:bodyPr/>
           <a:lstStyle/>
           <a:p>
-            <a:endParaRPr lang="es-CL"/>
+            <a:r>
+              <a:rPr lang="es-ES" dirty="0"/>
+              <a:t>Propiedades de la Programación Orientada a Objetos</a:t>
+            </a:r>
+            <a:endParaRPr lang="es-CL" dirty="0"/>
           </a:p>
         </p:txBody>
       </p:sp>
@@ -9317,10 +9433,150 @@
         </p:nvSpPr>
         <p:spPr/>
         <p:txBody>
-          <a:bodyPr/>
+          <a:bodyPr>
+            <a:normAutofit fontScale="62500" lnSpcReduction="20000"/>
+          </a:bodyPr>
           <a:lstStyle/>
           <a:p>
-            <a:endParaRPr lang="es-CL"/>
+            <a:r>
+              <a:rPr lang="es-ES" dirty="0"/>
+              <a:t>En programación ocurre lo mismo</a:t>
+            </a:r>
+            <a:r>
+              <a:rPr lang="es-ES" dirty="0" smtClean="0"/>
+              <a:t>.</a:t>
+            </a:r>
+          </a:p>
+          <a:p>
+            <a:endParaRPr lang="es-ES" dirty="0"/>
+          </a:p>
+          <a:p>
+            <a:r>
+              <a:rPr lang="es-CL" b="1" dirty="0" err="1" smtClean="0"/>
+              <a:t>class</a:t>
+            </a:r>
+            <a:r>
+              <a:rPr lang="es-CL" b="1" dirty="0" smtClean="0"/>
+              <a:t> </a:t>
+            </a:r>
+            <a:r>
+              <a:rPr lang="es-CL" b="1" dirty="0"/>
+              <a:t>Cafetera:</a:t>
+            </a:r>
+          </a:p>
+          <a:p>
+            <a:r>
+              <a:rPr lang="es-CL" b="1" dirty="0"/>
+              <a:t>    </a:t>
+            </a:r>
+            <a:r>
+              <a:rPr lang="es-CL" b="1" dirty="0" err="1"/>
+              <a:t>def</a:t>
+            </a:r>
+            <a:r>
+              <a:rPr lang="es-CL" b="1" dirty="0"/>
+              <a:t> </a:t>
+            </a:r>
+            <a:r>
+              <a:rPr lang="es-CL" b="1" dirty="0" err="1"/>
+              <a:t>preparar_cafe</a:t>
+            </a:r>
+            <a:r>
+              <a:rPr lang="es-CL" b="1" dirty="0"/>
+              <a:t>(</a:t>
+            </a:r>
+            <a:r>
+              <a:rPr lang="es-CL" b="1" dirty="0" err="1"/>
+              <a:t>self</a:t>
+            </a:r>
+            <a:r>
+              <a:rPr lang="es-CL" b="1" dirty="0"/>
+              <a:t>):</a:t>
+            </a:r>
+          </a:p>
+          <a:p>
+            <a:r>
+              <a:rPr lang="es-CL" b="1" dirty="0"/>
+              <a:t>        </a:t>
+            </a:r>
+            <a:r>
+              <a:rPr lang="es-CL" b="1" dirty="0" err="1"/>
+              <a:t>print</a:t>
+            </a:r>
+            <a:r>
+              <a:rPr lang="es-CL" b="1" dirty="0"/>
+              <a:t>("Preparando café</a:t>
+            </a:r>
+            <a:r>
+              <a:rPr lang="es-CL" b="1" dirty="0" smtClean="0"/>
+              <a:t>...")</a:t>
+            </a:r>
+          </a:p>
+          <a:p>
+            <a:endParaRPr lang="es-CL" dirty="0"/>
+          </a:p>
+          <a:p>
+            <a:r>
+              <a:rPr lang="en-US" dirty="0"/>
+              <a:t>El </a:t>
+            </a:r>
+            <a:r>
+              <a:rPr lang="en-US" dirty="0" err="1"/>
+              <a:t>usuario</a:t>
+            </a:r>
+            <a:r>
+              <a:rPr lang="en-US" dirty="0"/>
+              <a:t> solo llama</a:t>
+            </a:r>
+            <a:r>
+              <a:rPr lang="en-US" dirty="0" smtClean="0"/>
+              <a:t>:</a:t>
+            </a:r>
+          </a:p>
+          <a:p>
+            <a:endParaRPr lang="en-US" dirty="0" smtClean="0"/>
+          </a:p>
+          <a:p>
+            <a:r>
+              <a:rPr lang="es-CL" b="1" dirty="0"/>
+              <a:t>cafetera = Cafetera()</a:t>
+            </a:r>
+          </a:p>
+          <a:p>
+            <a:r>
+              <a:rPr lang="es-CL" b="1" dirty="0" err="1"/>
+              <a:t>cafetera.preparar_cafe</a:t>
+            </a:r>
+            <a:r>
+              <a:rPr lang="es-CL" b="1" dirty="0" smtClean="0"/>
+              <a:t>()</a:t>
+            </a:r>
+          </a:p>
+          <a:p>
+            <a:endParaRPr lang="es-CL" dirty="0"/>
+          </a:p>
+          <a:p>
+            <a:r>
+              <a:rPr lang="es-CL" dirty="0" smtClean="0"/>
+              <a:t>Resultado</a:t>
+            </a:r>
+          </a:p>
+          <a:p>
+            <a:pPr lvl="1"/>
+            <a:r>
+              <a:rPr lang="es-CL" b="1" dirty="0"/>
+              <a:t>Preparando café...</a:t>
+            </a:r>
+          </a:p>
+          <a:p>
+            <a:r>
+              <a:rPr lang="es-ES" dirty="0"/>
+              <a:t>No necesita conocer el proceso interno.</a:t>
+            </a:r>
+            <a:endParaRPr lang="es-CL" dirty="0" smtClean="0"/>
+          </a:p>
+          <a:p>
+            <a:endParaRPr lang="es-CL" dirty="0"/>
           </a:p>
         </p:txBody>
       </p:sp>
@@ -9369,7 +9625,11 @@
           <a:bodyPr/>
           <a:lstStyle/>
           <a:p>
-            <a:endParaRPr lang="es-CL"/>
+            <a:r>
+              <a:rPr lang="es-ES" dirty="0"/>
+              <a:t>Propiedades de la Programación Orientada a Objetos</a:t>
+            </a:r>
+            <a:endParaRPr lang="es-CL" dirty="0"/>
           </a:p>
         </p:txBody>
       </p:sp>
@@ -9383,12 +9643,574 @@
             <p:ph idx="1"/>
           </p:nvPr>
         </p:nvSpPr>
-        <p:spPr/>
+        <p:spPr>
+          <a:xfrm>
+            <a:off x="720000" y="1690688"/>
+            <a:ext cx="4664800" cy="5024147"/>
+          </a:xfrm>
+        </p:spPr>
         <p:txBody>
-          <a:bodyPr/>
+          <a:bodyPr>
+            <a:normAutofit fontScale="47500" lnSpcReduction="20000"/>
+          </a:bodyPr>
           <a:lstStyle/>
           <a:p>
-            <a:endParaRPr lang="es-CL"/>
+            <a:r>
+              <a:rPr lang="es-ES" b="1" dirty="0"/>
+              <a:t>2. Encapsulamiento</a:t>
+            </a:r>
+          </a:p>
+          <a:p>
+            <a:pPr lvl="1"/>
+            <a:r>
+              <a:rPr lang="es-ES" dirty="0"/>
+              <a:t>Consiste en proteger los datos del objeto para evitar modificaciones indebidas.</a:t>
+            </a:r>
+          </a:p>
+          <a:p>
+            <a:r>
+              <a:rPr lang="es-ES" dirty="0"/>
+              <a:t>Ejemplo</a:t>
+            </a:r>
+            <a:r>
+              <a:rPr lang="es-ES" dirty="0" smtClean="0"/>
+              <a:t>:</a:t>
+            </a:r>
+          </a:p>
+          <a:p>
+            <a:endParaRPr lang="es-ES" dirty="0"/>
+          </a:p>
+          <a:p>
+            <a:r>
+              <a:rPr lang="es-CL" dirty="0" err="1"/>
+              <a:t>class</a:t>
+            </a:r>
+            <a:r>
+              <a:rPr lang="es-CL" dirty="0"/>
+              <a:t> </a:t>
+            </a:r>
+            <a:r>
+              <a:rPr lang="es-CL" dirty="0" err="1"/>
+              <a:t>CuentaBancaria</a:t>
+            </a:r>
+            <a:r>
+              <a:rPr lang="es-CL" dirty="0"/>
+              <a:t>:</a:t>
+            </a:r>
+          </a:p>
+          <a:p>
+            <a:r>
+              <a:rPr lang="es-CL" dirty="0"/>
+              <a:t>    </a:t>
+            </a:r>
+            <a:r>
+              <a:rPr lang="es-CL" dirty="0" err="1"/>
+              <a:t>def</a:t>
+            </a:r>
+            <a:r>
+              <a:rPr lang="es-CL" dirty="0"/>
+              <a:t> __</a:t>
+            </a:r>
+            <a:r>
+              <a:rPr lang="es-CL" dirty="0" err="1"/>
+              <a:t>init</a:t>
+            </a:r>
+            <a:r>
+              <a:rPr lang="es-CL" dirty="0"/>
+              <a:t>__(</a:t>
+            </a:r>
+            <a:r>
+              <a:rPr lang="es-CL" dirty="0" err="1"/>
+              <a:t>self</a:t>
+            </a:r>
+            <a:r>
+              <a:rPr lang="es-CL" dirty="0"/>
+              <a:t>):</a:t>
+            </a:r>
+          </a:p>
+          <a:p>
+            <a:r>
+              <a:rPr lang="es-CL" dirty="0"/>
+              <a:t>        </a:t>
+            </a:r>
+            <a:r>
+              <a:rPr lang="es-CL" dirty="0" err="1"/>
+              <a:t>self</a:t>
+            </a:r>
+            <a:r>
+              <a:rPr lang="es-CL" dirty="0"/>
+              <a:t>.__saldo = 0</a:t>
+            </a:r>
+          </a:p>
+          <a:p>
+            <a:endParaRPr lang="es-CL" dirty="0"/>
+          </a:p>
+          <a:p>
+            <a:r>
+              <a:rPr lang="es-CL" dirty="0"/>
+              <a:t>    </a:t>
+            </a:r>
+            <a:r>
+              <a:rPr lang="es-CL" dirty="0" err="1"/>
+              <a:t>def</a:t>
+            </a:r>
+            <a:r>
+              <a:rPr lang="es-CL" dirty="0"/>
+              <a:t> depositar(</a:t>
+            </a:r>
+            <a:r>
+              <a:rPr lang="es-CL" dirty="0" err="1"/>
+              <a:t>self</a:t>
+            </a:r>
+            <a:r>
+              <a:rPr lang="es-CL" dirty="0"/>
+              <a:t>, monto):</a:t>
+            </a:r>
+          </a:p>
+          <a:p>
+            <a:r>
+              <a:rPr lang="es-CL" dirty="0"/>
+              <a:t>        </a:t>
+            </a:r>
+            <a:r>
+              <a:rPr lang="es-CL" dirty="0" err="1"/>
+              <a:t>if</a:t>
+            </a:r>
+            <a:r>
+              <a:rPr lang="es-CL" dirty="0"/>
+              <a:t> monto &gt; 0:</a:t>
+            </a:r>
+          </a:p>
+          <a:p>
+            <a:r>
+              <a:rPr lang="es-CL" dirty="0"/>
+              <a:t>            </a:t>
+            </a:r>
+            <a:r>
+              <a:rPr lang="es-CL" dirty="0" err="1"/>
+              <a:t>self</a:t>
+            </a:r>
+            <a:r>
+              <a:rPr lang="es-CL" dirty="0"/>
+              <a:t>.__saldo += monto</a:t>
+            </a:r>
+          </a:p>
+          <a:p>
+            <a:endParaRPr lang="es-CL" dirty="0"/>
+          </a:p>
+          <a:p>
+            <a:r>
+              <a:rPr lang="es-CL" dirty="0"/>
+              <a:t>    </a:t>
+            </a:r>
+            <a:r>
+              <a:rPr lang="es-CL" dirty="0" err="1"/>
+              <a:t>def</a:t>
+            </a:r>
+            <a:r>
+              <a:rPr lang="es-CL" dirty="0"/>
+              <a:t> retirar(</a:t>
+            </a:r>
+            <a:r>
+              <a:rPr lang="es-CL" dirty="0" err="1"/>
+              <a:t>self</a:t>
+            </a:r>
+            <a:r>
+              <a:rPr lang="es-CL" dirty="0"/>
+              <a:t>, monto):</a:t>
+            </a:r>
+          </a:p>
+          <a:p>
+            <a:r>
+              <a:rPr lang="es-CL" dirty="0"/>
+              <a:t>        </a:t>
+            </a:r>
+            <a:r>
+              <a:rPr lang="es-CL" dirty="0" err="1"/>
+              <a:t>if</a:t>
+            </a:r>
+            <a:r>
+              <a:rPr lang="es-CL" dirty="0"/>
+              <a:t> 0 &lt; monto &lt;= </a:t>
+            </a:r>
+            <a:r>
+              <a:rPr lang="es-CL" dirty="0" err="1"/>
+              <a:t>self</a:t>
+            </a:r>
+            <a:r>
+              <a:rPr lang="es-CL" dirty="0"/>
+              <a:t>.__saldo:</a:t>
+            </a:r>
+          </a:p>
+          <a:p>
+            <a:r>
+              <a:rPr lang="es-CL" dirty="0"/>
+              <a:t>            </a:t>
+            </a:r>
+            <a:r>
+              <a:rPr lang="es-CL" dirty="0" err="1"/>
+              <a:t>self</a:t>
+            </a:r>
+            <a:r>
+              <a:rPr lang="es-CL" dirty="0"/>
+              <a:t>.__saldo -= monto</a:t>
+            </a:r>
+          </a:p>
+          <a:p>
+            <a:endParaRPr lang="es-CL" dirty="0"/>
+          </a:p>
+          <a:p>
+            <a:r>
+              <a:rPr lang="es-CL" dirty="0"/>
+              <a:t>    </a:t>
+            </a:r>
+            <a:r>
+              <a:rPr lang="es-CL" dirty="0" err="1"/>
+              <a:t>def</a:t>
+            </a:r>
+            <a:r>
+              <a:rPr lang="es-CL" dirty="0"/>
+              <a:t> </a:t>
+            </a:r>
+            <a:r>
+              <a:rPr lang="es-CL" dirty="0" err="1"/>
+              <a:t>consultar_saldo</a:t>
+            </a:r>
+            <a:r>
+              <a:rPr lang="es-CL" dirty="0"/>
+              <a:t>(</a:t>
+            </a:r>
+            <a:r>
+              <a:rPr lang="es-CL" dirty="0" err="1"/>
+              <a:t>self</a:t>
+            </a:r>
+            <a:r>
+              <a:rPr lang="es-CL" dirty="0"/>
+              <a:t>):</a:t>
+            </a:r>
+          </a:p>
+          <a:p>
+            <a:r>
+              <a:rPr lang="es-CL" dirty="0"/>
+              <a:t>        </a:t>
+            </a:r>
+            <a:r>
+              <a:rPr lang="es-CL" dirty="0" err="1"/>
+              <a:t>return</a:t>
+            </a:r>
+            <a:r>
+              <a:rPr lang="es-CL" dirty="0"/>
+              <a:t> </a:t>
+            </a:r>
+            <a:r>
+              <a:rPr lang="es-CL" dirty="0" err="1"/>
+              <a:t>self</a:t>
+            </a:r>
+            <a:r>
+              <a:rPr lang="es-CL" dirty="0"/>
+              <a:t>.__saldo</a:t>
+            </a:r>
+            <a:endParaRPr lang="es-CL" dirty="0"/>
+          </a:p>
+        </p:txBody>
+      </p:sp>
+      <p:sp>
+        <p:nvSpPr>
+          <p:cNvPr id="4" name="Marcador de contenido 2"/>
+          <p:cNvSpPr txBox="1">
+            <a:spLocks/>
+          </p:cNvSpPr>
+          <p:nvPr/>
+        </p:nvSpPr>
+        <p:spPr>
+          <a:xfrm>
+            <a:off x="6095999" y="1690688"/>
+            <a:ext cx="5116945" cy="4750666"/>
+          </a:xfrm>
+          <a:prstGeom prst="rect">
+            <a:avLst/>
+          </a:prstGeom>
+        </p:spPr>
+        <p:txBody>
+          <a:bodyPr vert="horz" lIns="91440" tIns="45720" rIns="91440" bIns="45720" rtlCol="0">
+            <a:normAutofit/>
+          </a:bodyPr>
+          <a:lstStyle>
+            <a:lvl1pPr marL="228600" indent="-228600" algn="l" defTabSz="914400" rtl="0" eaLnBrk="1" latinLnBrk="0" hangingPunct="1">
+              <a:lnSpc>
+                <a:spcPct val="90000"/>
+              </a:lnSpc>
+              <a:spcBef>
+                <a:spcPts val="1000"/>
+              </a:spcBef>
+              <a:buFont typeface="Arial" panose="020B0604020202020204" pitchFamily="34" charset="0"/>
+              <a:buChar char="•"/>
+              <a:defRPr sz="2800" kern="1200">
+                <a:solidFill>
+                  <a:schemeClr val="tx1">
+                    <a:lumMod val="75000"/>
+                    <a:lumOff val="25000"/>
+                  </a:schemeClr>
+                </a:solidFill>
+                <a:latin typeface="Avenir Light" panose="020B0402020203020204"/>
+                <a:ea typeface="+mn-ea"/>
+                <a:cs typeface="+mn-cs"/>
+              </a:defRPr>
+            </a:lvl1pPr>
+            <a:lvl2pPr marL="685800" indent="-228600" algn="l" defTabSz="914400" rtl="0" eaLnBrk="1" latinLnBrk="0" hangingPunct="1">
+              <a:lnSpc>
+                <a:spcPct val="90000"/>
+              </a:lnSpc>
+              <a:spcBef>
+                <a:spcPts val="500"/>
+              </a:spcBef>
+              <a:buFont typeface="Arial" panose="020B0604020202020204" pitchFamily="34" charset="0"/>
+              <a:buChar char="•"/>
+              <a:defRPr sz="2400" kern="1200">
+                <a:solidFill>
+                  <a:schemeClr val="tx1">
+                    <a:lumMod val="75000"/>
+                    <a:lumOff val="25000"/>
+                  </a:schemeClr>
+                </a:solidFill>
+                <a:latin typeface="Avenir Light" panose="020B0402020203020204"/>
+                <a:ea typeface="+mn-ea"/>
+                <a:cs typeface="+mn-cs"/>
+              </a:defRPr>
+            </a:lvl2pPr>
+            <a:lvl3pPr marL="1143000" indent="-228600" algn="l" defTabSz="914400" rtl="0" eaLnBrk="1" latinLnBrk="0" hangingPunct="1">
+              <a:lnSpc>
+                <a:spcPct val="90000"/>
+              </a:lnSpc>
+              <a:spcBef>
+                <a:spcPts val="500"/>
+              </a:spcBef>
+              <a:buFont typeface="Arial" panose="020B0604020202020204" pitchFamily="34" charset="0"/>
+              <a:buChar char="•"/>
+              <a:defRPr sz="2000" kern="1200">
+                <a:solidFill>
+                  <a:schemeClr val="tx1">
+                    <a:lumMod val="75000"/>
+                    <a:lumOff val="25000"/>
+                  </a:schemeClr>
+                </a:solidFill>
+                <a:latin typeface="Avenir Light" panose="020B0402020203020204"/>
+                <a:ea typeface="+mn-ea"/>
+                <a:cs typeface="+mn-cs"/>
+              </a:defRPr>
+            </a:lvl3pPr>
+            <a:lvl4pPr marL="1600200" indent="-228600" algn="l" defTabSz="914400" rtl="0" eaLnBrk="1" latinLnBrk="0" hangingPunct="1">
+              <a:lnSpc>
+                <a:spcPct val="90000"/>
+              </a:lnSpc>
+              <a:spcBef>
+                <a:spcPts val="500"/>
+              </a:spcBef>
+              <a:buFont typeface="Arial" panose="020B0604020202020204" pitchFamily="34" charset="0"/>
+              <a:buChar char="•"/>
+              <a:defRPr sz="1800" kern="1200">
+                <a:solidFill>
+                  <a:schemeClr val="tx1">
+                    <a:lumMod val="75000"/>
+                    <a:lumOff val="25000"/>
+                  </a:schemeClr>
+                </a:solidFill>
+                <a:latin typeface="Avenir Light" panose="020B0402020203020204"/>
+                <a:ea typeface="+mn-ea"/>
+                <a:cs typeface="+mn-cs"/>
+              </a:defRPr>
+            </a:lvl4pPr>
+            <a:lvl5pPr marL="2057400" indent="-228600" algn="l" defTabSz="914400" rtl="0" eaLnBrk="1" latinLnBrk="0" hangingPunct="1">
+              <a:lnSpc>
+                <a:spcPct val="90000"/>
+              </a:lnSpc>
+              <a:spcBef>
+                <a:spcPts val="500"/>
+              </a:spcBef>
+              <a:buFont typeface="Arial" panose="020B0604020202020204" pitchFamily="34" charset="0"/>
+              <a:buChar char="•"/>
+              <a:defRPr sz="1800" kern="1200">
+                <a:solidFill>
+                  <a:schemeClr val="tx1">
+                    <a:lumMod val="75000"/>
+                    <a:lumOff val="25000"/>
+                  </a:schemeClr>
+                </a:solidFill>
+                <a:latin typeface="Avenir Light" panose="020B0402020203020204"/>
+                <a:ea typeface="+mn-ea"/>
+                <a:cs typeface="+mn-cs"/>
+              </a:defRPr>
+            </a:lvl5pPr>
+            <a:lvl6pPr marL="2514600" indent="-228600" algn="l" defTabSz="914400" rtl="0" eaLnBrk="1" latinLnBrk="0" hangingPunct="1">
+              <a:lnSpc>
+                <a:spcPct val="90000"/>
+              </a:lnSpc>
+              <a:spcBef>
+                <a:spcPts val="500"/>
+              </a:spcBef>
+              <a:buFont typeface="Arial" panose="020B0604020202020204" pitchFamily="34" charset="0"/>
+              <a:buChar char="•"/>
+              <a:defRPr sz="1800" kern="1200">
+                <a:solidFill>
+                  <a:schemeClr val="tx1"/>
+                </a:solidFill>
+                <a:latin typeface="+mn-lt"/>
+                <a:ea typeface="+mn-ea"/>
+                <a:cs typeface="+mn-cs"/>
+              </a:defRPr>
+            </a:lvl6pPr>
+            <a:lvl7pPr marL="2971800" indent="-228600" algn="l" defTabSz="914400" rtl="0" eaLnBrk="1" latinLnBrk="0" hangingPunct="1">
+              <a:lnSpc>
+                <a:spcPct val="90000"/>
+              </a:lnSpc>
+              <a:spcBef>
+                <a:spcPts val="500"/>
+              </a:spcBef>
+              <a:buFont typeface="Arial" panose="020B0604020202020204" pitchFamily="34" charset="0"/>
+              <a:buChar char="•"/>
+              <a:defRPr sz="1800" kern="1200">
+                <a:solidFill>
+                  <a:schemeClr val="tx1"/>
+                </a:solidFill>
+                <a:latin typeface="+mn-lt"/>
+                <a:ea typeface="+mn-ea"/>
+                <a:cs typeface="+mn-cs"/>
+              </a:defRPr>
+            </a:lvl7pPr>
+            <a:lvl8pPr marL="3429000" indent="-228600" algn="l" defTabSz="914400" rtl="0" eaLnBrk="1" latinLnBrk="0" hangingPunct="1">
+              <a:lnSpc>
+                <a:spcPct val="90000"/>
+              </a:lnSpc>
+              <a:spcBef>
+                <a:spcPts val="500"/>
+              </a:spcBef>
+              <a:buFont typeface="Arial" panose="020B0604020202020204" pitchFamily="34" charset="0"/>
+              <a:buChar char="•"/>
+              <a:defRPr sz="1800" kern="1200">
+                <a:solidFill>
+                  <a:schemeClr val="tx1"/>
+                </a:solidFill>
+                <a:latin typeface="+mn-lt"/>
+                <a:ea typeface="+mn-ea"/>
+                <a:cs typeface="+mn-cs"/>
+              </a:defRPr>
+            </a:lvl8pPr>
+            <a:lvl9pPr marL="3886200" indent="-228600" algn="l" defTabSz="914400" rtl="0" eaLnBrk="1" latinLnBrk="0" hangingPunct="1">
+              <a:lnSpc>
+                <a:spcPct val="90000"/>
+              </a:lnSpc>
+              <a:spcBef>
+                <a:spcPts val="500"/>
+              </a:spcBef>
+              <a:buFont typeface="Arial" panose="020B0604020202020204" pitchFamily="34" charset="0"/>
+              <a:buChar char="•"/>
+              <a:defRPr sz="1800" kern="1200">
+                <a:solidFill>
+                  <a:schemeClr val="tx1"/>
+                </a:solidFill>
+                <a:latin typeface="+mn-lt"/>
+                <a:ea typeface="+mn-ea"/>
+                <a:cs typeface="+mn-cs"/>
+              </a:defRPr>
+            </a:lvl9pPr>
+          </a:lstStyle>
+          <a:p>
+            <a:r>
+              <a:rPr lang="en-US" sz="1300" dirty="0" err="1"/>
+              <a:t>Uso</a:t>
+            </a:r>
+            <a:r>
+              <a:rPr lang="en-US" sz="1300" dirty="0" smtClean="0"/>
+              <a:t>:</a:t>
+            </a:r>
+          </a:p>
+          <a:p>
+            <a:endParaRPr lang="es-ES" sz="1300" dirty="0" smtClean="0"/>
+          </a:p>
+          <a:p>
+            <a:r>
+              <a:rPr lang="es-ES" sz="1300" dirty="0" smtClean="0"/>
+              <a:t>cuenta </a:t>
+            </a:r>
+            <a:r>
+              <a:rPr lang="es-ES" sz="1300" dirty="0"/>
+              <a:t>= </a:t>
+            </a:r>
+            <a:r>
+              <a:rPr lang="es-ES" sz="1300" dirty="0" err="1"/>
+              <a:t>CuentaBancaria</a:t>
+            </a:r>
+            <a:r>
+              <a:rPr lang="es-ES" sz="1300" dirty="0"/>
+              <a:t>()</a:t>
+            </a:r>
+          </a:p>
+          <a:p>
+            <a:endParaRPr lang="es-ES" sz="1300" dirty="0"/>
+          </a:p>
+          <a:p>
+            <a:r>
+              <a:rPr lang="es-ES" sz="1300" dirty="0" err="1"/>
+              <a:t>cuenta.depositar</a:t>
+            </a:r>
+            <a:r>
+              <a:rPr lang="es-ES" sz="1300" dirty="0"/>
+              <a:t>(500)</a:t>
+            </a:r>
+          </a:p>
+          <a:p>
+            <a:r>
+              <a:rPr lang="es-ES" sz="1300" dirty="0" err="1"/>
+              <a:t>cuenta.retirar</a:t>
+            </a:r>
+            <a:r>
+              <a:rPr lang="es-ES" sz="1300" dirty="0"/>
+              <a:t>(100)</a:t>
+            </a:r>
+          </a:p>
+          <a:p>
+            <a:endParaRPr lang="es-ES" sz="1300" dirty="0"/>
+          </a:p>
+          <a:p>
+            <a:r>
+              <a:rPr lang="es-ES" sz="1300" dirty="0" err="1"/>
+              <a:t>print</a:t>
+            </a:r>
+            <a:r>
+              <a:rPr lang="es-ES" sz="1300" dirty="0"/>
+              <a:t>(</a:t>
+            </a:r>
+            <a:r>
+              <a:rPr lang="es-ES" sz="1300" dirty="0" err="1"/>
+              <a:t>cuenta.consultar_saldo</a:t>
+            </a:r>
+            <a:r>
+              <a:rPr lang="es-ES" sz="1300" dirty="0" smtClean="0"/>
+              <a:t>())</a:t>
+            </a:r>
+          </a:p>
+          <a:p>
+            <a:endParaRPr lang="es-ES" dirty="0" smtClean="0"/>
+          </a:p>
+          <a:p>
+            <a:r>
+              <a:rPr lang="es-ES" sz="1300" dirty="0" smtClean="0"/>
+              <a:t>Resultado</a:t>
+            </a:r>
+          </a:p>
+          <a:p>
+            <a:pPr lvl="1"/>
+            <a:r>
+              <a:rPr lang="es-ES" sz="1300" dirty="0" smtClean="0"/>
+              <a:t>400</a:t>
+            </a:r>
+            <a:endParaRPr lang="es-ES" sz="1300" dirty="0"/>
+          </a:p>
+          <a:p>
+            <a:pPr marL="0" indent="0">
+              <a:buNone/>
+            </a:pPr>
+            <a:endParaRPr lang="es-ES" dirty="0" smtClean="0"/>
           </a:p>
         </p:txBody>
       </p:sp>
@@ -9437,7 +10259,11 @@
           <a:bodyPr/>
           <a:lstStyle/>
           <a:p>
-            <a:endParaRPr lang="es-CL"/>
+            <a:r>
+              <a:rPr lang="es-ES" dirty="0"/>
+              <a:t>Propiedades de la Programación Orientada a Objetos</a:t>
+            </a:r>
+            <a:endParaRPr lang="es-CL" dirty="0"/>
           </a:p>
         </p:txBody>
       </p:sp>
@@ -9451,32 +10277,252 @@
             <p:ph idx="1"/>
           </p:nvPr>
         </p:nvSpPr>
-        <p:spPr/>
+        <p:spPr>
+          <a:xfrm>
+            <a:off x="720000" y="1825624"/>
+            <a:ext cx="10752000" cy="4778375"/>
+          </a:xfrm>
+        </p:spPr>
         <p:txBody>
           <a:bodyPr/>
           <a:lstStyle/>
           <a:p>
-            <a:endParaRPr lang="es-CL"/>
+            <a:r>
+              <a:rPr lang="es-ES" b="1" dirty="0"/>
+              <a:t>3. Herencia</a:t>
+            </a:r>
+          </a:p>
+          <a:p>
+            <a:pPr lvl="1"/>
+            <a:r>
+              <a:rPr lang="es-ES" dirty="0"/>
+              <a:t>Permite que una clase reutilice atributos y métodos de otra.</a:t>
+            </a:r>
+          </a:p>
+          <a:p>
+            <a:r>
+              <a:rPr lang="es-ES" dirty="0"/>
+              <a:t>Ejemplo:</a:t>
+            </a:r>
+          </a:p>
+          <a:p>
+            <a:endParaRPr lang="es-CL" dirty="0"/>
           </a:p>
         </p:txBody>
       </p:sp>
+      <p:sp>
+        <p:nvSpPr>
+          <p:cNvPr id="4" name="Rectángulo redondeado 3"/>
+          <p:cNvSpPr/>
+          <p:nvPr/>
+        </p:nvSpPr>
+        <p:spPr>
+          <a:xfrm>
+            <a:off x="4645890" y="3020291"/>
+            <a:ext cx="1644073" cy="692728"/>
+          </a:xfrm>
+          <a:prstGeom prst="roundRect">
+            <a:avLst/>
+          </a:prstGeom>
+        </p:spPr>
+        <p:style>
+          <a:lnRef idx="2">
+            <a:schemeClr val="accent1">
+              <a:shade val="50000"/>
+            </a:schemeClr>
+          </a:lnRef>
+          <a:fillRef idx="1">
+            <a:schemeClr val="accent1"/>
+          </a:fillRef>
+          <a:effectRef idx="0">
+            <a:schemeClr val="accent1"/>
+          </a:effectRef>
+          <a:fontRef idx="minor">
+            <a:schemeClr val="lt1"/>
+          </a:fontRef>
+        </p:style>
+        <p:txBody>
+          <a:bodyPr rtlCol="0" anchor="ctr"/>
+          <a:lstStyle/>
+          <a:p>
+            <a:pPr algn="ctr"/>
+            <a:r>
+              <a:rPr lang="es-CL" dirty="0" smtClean="0"/>
+              <a:t>Animal</a:t>
+            </a:r>
+            <a:endParaRPr lang="es-CL" dirty="0"/>
+          </a:p>
+        </p:txBody>
+      </p:sp>
+      <p:sp>
+        <p:nvSpPr>
+          <p:cNvPr id="5" name="Rectángulo redondeado 4"/>
+          <p:cNvSpPr/>
+          <p:nvPr/>
+        </p:nvSpPr>
+        <p:spPr>
+          <a:xfrm>
+            <a:off x="4645889" y="4359563"/>
+            <a:ext cx="1644073" cy="711200"/>
+          </a:xfrm>
+          <a:prstGeom prst="roundRect">
+            <a:avLst/>
+          </a:prstGeom>
+        </p:spPr>
+        <p:style>
+          <a:lnRef idx="2">
+            <a:schemeClr val="accent1">
+              <a:shade val="50000"/>
+            </a:schemeClr>
+          </a:lnRef>
+          <a:fillRef idx="1">
+            <a:schemeClr val="accent1"/>
+          </a:fillRef>
+          <a:effectRef idx="0">
+            <a:schemeClr val="accent1"/>
+          </a:effectRef>
+          <a:fontRef idx="minor">
+            <a:schemeClr val="lt1"/>
+          </a:fontRef>
+        </p:style>
+        <p:txBody>
+          <a:bodyPr rtlCol="0" anchor="ctr"/>
+          <a:lstStyle/>
+          <a:p>
+            <a:pPr algn="ctr"/>
+            <a:r>
+              <a:rPr lang="es-CL" dirty="0" smtClean="0"/>
+              <a:t>Perro</a:t>
+            </a:r>
+            <a:endParaRPr lang="es-CL" dirty="0"/>
+          </a:p>
+        </p:txBody>
+      </p:sp>
+      <p:sp>
+        <p:nvSpPr>
+          <p:cNvPr id="6" name="Rectángulo redondeado 5"/>
+          <p:cNvSpPr/>
+          <p:nvPr/>
+        </p:nvSpPr>
+        <p:spPr>
+          <a:xfrm>
+            <a:off x="4645889" y="5717308"/>
+            <a:ext cx="1644073" cy="729673"/>
+          </a:xfrm>
+          <a:prstGeom prst="roundRect">
+            <a:avLst/>
+          </a:prstGeom>
+        </p:spPr>
+        <p:style>
+          <a:lnRef idx="2">
+            <a:schemeClr val="accent1">
+              <a:shade val="50000"/>
+            </a:schemeClr>
+          </a:lnRef>
+          <a:fillRef idx="1">
+            <a:schemeClr val="accent1"/>
+          </a:fillRef>
+          <a:effectRef idx="0">
+            <a:schemeClr val="accent1"/>
+          </a:effectRef>
+          <a:fontRef idx="minor">
+            <a:schemeClr val="lt1"/>
+          </a:fontRef>
+        </p:style>
+        <p:txBody>
+          <a:bodyPr rtlCol="0" anchor="ctr"/>
+          <a:lstStyle/>
+          <a:p>
+            <a:pPr algn="ctr"/>
+            <a:r>
+              <a:rPr lang="es-CL" dirty="0" smtClean="0"/>
+              <a:t>Pastor Alemán</a:t>
+            </a:r>
+          </a:p>
+        </p:txBody>
+      </p:sp>
+      <p:cxnSp>
+        <p:nvCxnSpPr>
+          <p:cNvPr id="8" name="Conector recto de flecha 7"/>
+          <p:cNvCxnSpPr>
+            <a:stCxn id="4" idx="2"/>
+            <a:endCxn id="5" idx="0"/>
+          </p:cNvCxnSpPr>
+          <p:nvPr/>
+        </p:nvCxnSpPr>
+        <p:spPr>
+          <a:xfrm flipH="1">
+            <a:off x="5467926" y="3713019"/>
+            <a:ext cx="1" cy="646544"/>
+          </a:xfrm>
+          <a:prstGeom prst="straightConnector1">
+            <a:avLst/>
+          </a:prstGeom>
+          <a:ln w="57150">
+            <a:tailEnd type="triangle"/>
+          </a:ln>
+        </p:spPr>
+        <p:style>
+          <a:lnRef idx="2">
+            <a:schemeClr val="accent1"/>
+          </a:lnRef>
+          <a:fillRef idx="0">
+            <a:schemeClr val="accent1"/>
+          </a:fillRef>
+          <a:effectRef idx="1">
+            <a:schemeClr val="accent1"/>
+          </a:effectRef>
+          <a:fontRef idx="minor">
+            <a:schemeClr val="tx1"/>
+          </a:fontRef>
+        </p:style>
+      </p:cxnSp>
+      <p:cxnSp>
+        <p:nvCxnSpPr>
+          <p:cNvPr id="10" name="Conector recto de flecha 9"/>
+          <p:cNvCxnSpPr>
+            <a:stCxn id="5" idx="2"/>
+            <a:endCxn id="6" idx="0"/>
+          </p:cNvCxnSpPr>
+          <p:nvPr/>
+        </p:nvCxnSpPr>
+        <p:spPr>
+          <a:xfrm>
+            <a:off x="5467926" y="5070763"/>
+            <a:ext cx="0" cy="646545"/>
+          </a:xfrm>
+          <a:prstGeom prst="straightConnector1">
+            <a:avLst/>
+          </a:prstGeom>
+          <a:ln w="57150">
+            <a:tailEnd type="triangle"/>
+          </a:ln>
+        </p:spPr>
+        <p:style>
+          <a:lnRef idx="2">
+            <a:schemeClr val="accent1"/>
+          </a:lnRef>
+          <a:fillRef idx="0">
+            <a:schemeClr val="accent1"/>
+          </a:fillRef>
+          <a:effectRef idx="1">
+            <a:schemeClr val="accent1"/>
+          </a:effectRef>
+          <a:fontRef idx="minor">
+            <a:schemeClr val="tx1"/>
+          </a:fontRef>
+        </p:style>
+      </p:cxnSp>
     </p:spTree>
     <p:extLst>
       <p:ext uri="{BB962C8B-B14F-4D97-AF65-F5344CB8AC3E}">
-        <p14:creationId xmlns:p14="http://schemas.microsoft.com/office/powerpoint/2010/main" val="203882194"/>
+        <p14:creationId xmlns:p14="http://schemas.microsoft.com/office/powerpoint/2010/main" val="3460269462"/>
       </p:ext>
     </p:extLst>
   </p:cSld>
   <p:clrMapOvr>
     <a:masterClrMapping/>
   </p:clrMapOvr>
-  <p:timing>
-    <p:tnLst>
-      <p:par>
-        <p:cTn id="1" dur="indefinite" restart="never" nodeType="tmRoot"/>
-      </p:par>
-    </p:tnLst>
-  </p:timing>
 </p:sld>
 </file>
 
@@ -9499,38 +10545,7 @@
       </p:grpSpPr>
       <p:sp>
         <p:nvSpPr>
-          <p:cNvPr id="5" name="Marcador de contenido 4">
-            <a:extLst>
-              <a:ext uri="{FF2B5EF4-FFF2-40B4-BE49-F238E27FC236}">
-                <a16:creationId xmlns:a16="http://schemas.microsoft.com/office/drawing/2014/main" id="{9DD61DCE-439C-8992-2CBC-B9F18BA94FB8}"/>
-              </a:ext>
-            </a:extLst>
-          </p:cNvPr>
-          <p:cNvSpPr>
-            <a:spLocks noGrp="1"/>
-          </p:cNvSpPr>
-          <p:nvPr>
-            <p:ph idx="1"/>
-          </p:nvPr>
-        </p:nvSpPr>
-        <p:spPr/>
-        <p:txBody>
-          <a:bodyPr/>
-          <a:lstStyle/>
-          <a:p>
-            <a:endParaRPr lang="es-CL"/>
-          </a:p>
-        </p:txBody>
-      </p:sp>
-      <p:sp>
-        <p:nvSpPr>
-          <p:cNvPr id="7" name="Título 6">
-            <a:extLst>
-              <a:ext uri="{FF2B5EF4-FFF2-40B4-BE49-F238E27FC236}">
-                <a16:creationId xmlns:a16="http://schemas.microsoft.com/office/drawing/2014/main" id="{6C6AC09E-3440-1040-862D-E5AEDC3994D8}"/>
-              </a:ext>
-            </a:extLst>
-          </p:cNvPr>
+          <p:cNvPr id="2" name="Título 1"/>
           <p:cNvSpPr>
             <a:spLocks noGrp="1"/>
           </p:cNvSpPr>
@@ -9543,14 +10558,215 @@
           <a:bodyPr/>
           <a:lstStyle/>
           <a:p>
-            <a:endParaRPr lang="es-CL"/>
+            <a:r>
+              <a:rPr lang="es-ES" dirty="0"/>
+              <a:t>Propiedades de la Programación Orientada a Objetos</a:t>
+            </a:r>
+            <a:endParaRPr lang="es-CL" dirty="0"/>
+          </a:p>
+        </p:txBody>
+      </p:sp>
+      <p:sp>
+        <p:nvSpPr>
+          <p:cNvPr id="3" name="Marcador de contenido 2"/>
+          <p:cNvSpPr>
+            <a:spLocks noGrp="1"/>
+          </p:cNvSpPr>
+          <p:nvPr>
+            <p:ph idx="1"/>
+          </p:nvPr>
+        </p:nvSpPr>
+        <p:spPr>
+          <a:xfrm>
+            <a:off x="720000" y="1825625"/>
+            <a:ext cx="10752000" cy="4750666"/>
+          </a:xfrm>
+        </p:spPr>
+        <p:txBody>
+          <a:bodyPr>
+            <a:normAutofit fontScale="47500" lnSpcReduction="20000"/>
+          </a:bodyPr>
+          <a:lstStyle/>
+          <a:p>
+            <a:r>
+              <a:rPr lang="en-US" b="1" dirty="0" err="1"/>
+              <a:t>Código</a:t>
+            </a:r>
+            <a:r>
+              <a:rPr lang="en-US" b="1" dirty="0" smtClean="0"/>
+              <a:t>:</a:t>
+            </a:r>
+          </a:p>
+          <a:p>
+            <a:r>
+              <a:rPr lang="es-CL" dirty="0" err="1"/>
+              <a:t>class</a:t>
+            </a:r>
+            <a:r>
+              <a:rPr lang="es-CL" dirty="0"/>
+              <a:t> Animal:</a:t>
+            </a:r>
+          </a:p>
+          <a:p>
+            <a:r>
+              <a:rPr lang="es-CL" dirty="0"/>
+              <a:t>    </a:t>
+            </a:r>
+            <a:r>
+              <a:rPr lang="es-CL" dirty="0" err="1"/>
+              <a:t>def</a:t>
+            </a:r>
+            <a:r>
+              <a:rPr lang="es-CL" dirty="0"/>
+              <a:t> comer(</a:t>
+            </a:r>
+            <a:r>
+              <a:rPr lang="es-CL" dirty="0" err="1"/>
+              <a:t>self</a:t>
+            </a:r>
+            <a:r>
+              <a:rPr lang="es-CL" dirty="0"/>
+              <a:t>):</a:t>
+            </a:r>
+          </a:p>
+          <a:p>
+            <a:r>
+              <a:rPr lang="es-CL" dirty="0"/>
+              <a:t>        </a:t>
+            </a:r>
+            <a:r>
+              <a:rPr lang="es-CL" dirty="0" err="1"/>
+              <a:t>print</a:t>
+            </a:r>
+            <a:r>
+              <a:rPr lang="es-CL" dirty="0"/>
+              <a:t>("Estoy comiendo")</a:t>
+            </a:r>
+          </a:p>
+          <a:p>
+            <a:endParaRPr lang="es-CL" dirty="0"/>
+          </a:p>
+          <a:p>
+            <a:r>
+              <a:rPr lang="es-CL" dirty="0" err="1"/>
+              <a:t>class</a:t>
+            </a:r>
+            <a:r>
+              <a:rPr lang="es-CL" dirty="0"/>
+              <a:t> Perro(Animal):</a:t>
+            </a:r>
+          </a:p>
+          <a:p>
+            <a:r>
+              <a:rPr lang="es-CL" dirty="0"/>
+              <a:t>    </a:t>
+            </a:r>
+            <a:r>
+              <a:rPr lang="es-CL" dirty="0" err="1"/>
+              <a:t>def</a:t>
+            </a:r>
+            <a:r>
+              <a:rPr lang="es-CL" dirty="0"/>
+              <a:t> ladrar(</a:t>
+            </a:r>
+            <a:r>
+              <a:rPr lang="es-CL" dirty="0" err="1"/>
+              <a:t>self</a:t>
+            </a:r>
+            <a:r>
+              <a:rPr lang="es-CL" dirty="0"/>
+              <a:t>):</a:t>
+            </a:r>
+          </a:p>
+          <a:p>
+            <a:r>
+              <a:rPr lang="es-CL" dirty="0"/>
+              <a:t>        </a:t>
+            </a:r>
+            <a:r>
+              <a:rPr lang="es-CL" dirty="0" err="1"/>
+              <a:t>print</a:t>
+            </a:r>
+            <a:r>
+              <a:rPr lang="es-CL" dirty="0"/>
+              <a:t>("Guau</a:t>
+            </a:r>
+            <a:r>
+              <a:rPr lang="es-CL" dirty="0" smtClean="0"/>
+              <a:t>")</a:t>
+            </a:r>
+          </a:p>
+          <a:p>
+            <a:endParaRPr lang="es-CL" dirty="0"/>
+          </a:p>
+          <a:p>
+            <a:r>
+              <a:rPr lang="en-US" b="1" dirty="0" err="1"/>
+              <a:t>Uso</a:t>
+            </a:r>
+            <a:r>
+              <a:rPr lang="en-US" b="1" dirty="0" smtClean="0"/>
+              <a:t>:</a:t>
+            </a:r>
+          </a:p>
+          <a:p>
+            <a:r>
+              <a:rPr lang="es-CL" dirty="0"/>
+              <a:t>p = Perro()</a:t>
+            </a:r>
+          </a:p>
+          <a:p>
+            <a:endParaRPr lang="es-CL" dirty="0"/>
+          </a:p>
+          <a:p>
+            <a:r>
+              <a:rPr lang="es-CL" dirty="0" err="1"/>
+              <a:t>p.comer</a:t>
+            </a:r>
+            <a:r>
+              <a:rPr lang="es-CL" dirty="0"/>
+              <a:t>()</a:t>
+            </a:r>
+          </a:p>
+          <a:p>
+            <a:r>
+              <a:rPr lang="es-CL" dirty="0" err="1"/>
+              <a:t>p.ladrar</a:t>
+            </a:r>
+            <a:r>
+              <a:rPr lang="es-CL" dirty="0" smtClean="0"/>
+              <a:t>()</a:t>
+            </a:r>
+          </a:p>
+          <a:p>
+            <a:endParaRPr lang="es-CL" dirty="0"/>
+          </a:p>
+          <a:p>
+            <a:r>
+              <a:rPr lang="es-CL" b="1" dirty="0" smtClean="0"/>
+              <a:t>Resultado</a:t>
+            </a:r>
+          </a:p>
+          <a:p>
+            <a:pPr lvl="1"/>
+            <a:r>
+              <a:rPr lang="es-CL" dirty="0"/>
+              <a:t>Estoy comiendo</a:t>
+            </a:r>
+          </a:p>
+          <a:p>
+            <a:pPr lvl="1"/>
+            <a:r>
+              <a:rPr lang="es-CL" dirty="0"/>
+              <a:t>Guau</a:t>
+            </a:r>
           </a:p>
         </p:txBody>
       </p:sp>
     </p:spTree>
     <p:extLst>
       <p:ext uri="{BB962C8B-B14F-4D97-AF65-F5344CB8AC3E}">
-        <p14:creationId xmlns:p14="http://schemas.microsoft.com/office/powerpoint/2010/main" val="3300741064"/>
+        <p14:creationId xmlns:p14="http://schemas.microsoft.com/office/powerpoint/2010/main" val="389183380"/>
       </p:ext>
     </p:extLst>
   </p:cSld>
@@ -9599,20 +10815,258 @@
           <a:bodyPr/>
           <a:lstStyle/>
           <a:p>
-            <a:endParaRPr lang="es-CL"/>
+            <a:r>
+              <a:rPr lang="es-ES" dirty="0"/>
+              <a:t>Propiedades de la Programación Orientada a Objetos</a:t>
+            </a:r>
+            <a:endParaRPr lang="es-CL" dirty="0"/>
+          </a:p>
+        </p:txBody>
+      </p:sp>
+      <p:sp>
+        <p:nvSpPr>
+          <p:cNvPr id="3" name="Marcador de contenido 2"/>
+          <p:cNvSpPr>
+            <a:spLocks noGrp="1"/>
+          </p:cNvSpPr>
+          <p:nvPr>
+            <p:ph idx="1"/>
+          </p:nvPr>
+        </p:nvSpPr>
+        <p:spPr>
+          <a:xfrm>
+            <a:off x="720000" y="1825624"/>
+            <a:ext cx="10752000" cy="4843031"/>
+          </a:xfrm>
+        </p:spPr>
+        <p:txBody>
+          <a:bodyPr>
+            <a:normAutofit fontScale="40000" lnSpcReduction="20000"/>
+          </a:bodyPr>
+          <a:lstStyle/>
+          <a:p>
+            <a:r>
+              <a:rPr lang="es-ES" b="1" dirty="0"/>
+              <a:t>4. Polimorfismo</a:t>
+            </a:r>
+          </a:p>
+          <a:p>
+            <a:pPr lvl="1"/>
+            <a:r>
+              <a:rPr lang="es-ES" dirty="0"/>
+              <a:t>El mismo método puede comportarse de manera diferente según el objeto</a:t>
+            </a:r>
+            <a:r>
+              <a:rPr lang="es-ES" dirty="0" smtClean="0"/>
+              <a:t>.</a:t>
+            </a:r>
+          </a:p>
+          <a:p>
+            <a:r>
+              <a:rPr lang="es-ES" dirty="0" err="1"/>
+              <a:t>class</a:t>
+            </a:r>
+            <a:r>
+              <a:rPr lang="es-ES" dirty="0"/>
+              <a:t> Perro:</a:t>
+            </a:r>
+          </a:p>
+          <a:p>
+            <a:r>
+              <a:rPr lang="es-ES" dirty="0"/>
+              <a:t>    </a:t>
+            </a:r>
+            <a:r>
+              <a:rPr lang="es-ES" dirty="0" err="1"/>
+              <a:t>def</a:t>
+            </a:r>
+            <a:r>
+              <a:rPr lang="es-ES" dirty="0"/>
+              <a:t> hablar(</a:t>
+            </a:r>
+            <a:r>
+              <a:rPr lang="es-ES" dirty="0" err="1"/>
+              <a:t>self</a:t>
+            </a:r>
+            <a:r>
+              <a:rPr lang="es-ES" dirty="0"/>
+              <a:t>):</a:t>
+            </a:r>
+          </a:p>
+          <a:p>
+            <a:r>
+              <a:rPr lang="es-ES" dirty="0"/>
+              <a:t>        </a:t>
+            </a:r>
+            <a:r>
+              <a:rPr lang="es-ES" dirty="0" err="1"/>
+              <a:t>print</a:t>
+            </a:r>
+            <a:r>
+              <a:rPr lang="es-ES" dirty="0"/>
+              <a:t>("Guau")</a:t>
+            </a:r>
+          </a:p>
+          <a:p>
+            <a:endParaRPr lang="es-ES" dirty="0"/>
+          </a:p>
+          <a:p>
+            <a:r>
+              <a:rPr lang="es-ES" dirty="0" err="1"/>
+              <a:t>class</a:t>
+            </a:r>
+            <a:r>
+              <a:rPr lang="es-ES" dirty="0"/>
+              <a:t> Gato:</a:t>
+            </a:r>
+          </a:p>
+          <a:p>
+            <a:r>
+              <a:rPr lang="es-ES" dirty="0"/>
+              <a:t>    </a:t>
+            </a:r>
+            <a:r>
+              <a:rPr lang="es-ES" dirty="0" err="1"/>
+              <a:t>def</a:t>
+            </a:r>
+            <a:r>
+              <a:rPr lang="es-ES" dirty="0"/>
+              <a:t> hablar(</a:t>
+            </a:r>
+            <a:r>
+              <a:rPr lang="es-ES" dirty="0" err="1"/>
+              <a:t>self</a:t>
+            </a:r>
+            <a:r>
+              <a:rPr lang="es-ES" dirty="0"/>
+              <a:t>):</a:t>
+            </a:r>
+          </a:p>
+          <a:p>
+            <a:r>
+              <a:rPr lang="es-ES" dirty="0"/>
+              <a:t>        </a:t>
+            </a:r>
+            <a:r>
+              <a:rPr lang="es-ES" dirty="0" err="1"/>
+              <a:t>print</a:t>
+            </a:r>
+            <a:r>
+              <a:rPr lang="es-ES" dirty="0"/>
+              <a:t>("Miau</a:t>
+            </a:r>
+            <a:r>
+              <a:rPr lang="es-ES" dirty="0" smtClean="0"/>
+              <a:t>")</a:t>
+            </a:r>
+          </a:p>
+          <a:p>
+            <a:endParaRPr lang="es-ES" dirty="0"/>
+          </a:p>
+          <a:p>
+            <a:r>
+              <a:rPr lang="en-US" b="1" dirty="0" err="1"/>
+              <a:t>Uso</a:t>
+            </a:r>
+            <a:r>
+              <a:rPr lang="en-US" b="1" dirty="0" smtClean="0"/>
+              <a:t>:</a:t>
+            </a:r>
+          </a:p>
+          <a:p>
+            <a:r>
+              <a:rPr lang="es-ES" dirty="0"/>
+              <a:t>animales = [Perro(), Gato()]</a:t>
+            </a:r>
+          </a:p>
+          <a:p>
+            <a:endParaRPr lang="es-ES" dirty="0"/>
+          </a:p>
+          <a:p>
+            <a:r>
+              <a:rPr lang="es-ES" dirty="0" err="1"/>
+              <a:t>for</a:t>
+            </a:r>
+            <a:r>
+              <a:rPr lang="es-ES" dirty="0"/>
+              <a:t> animal in animales:</a:t>
+            </a:r>
+          </a:p>
+          <a:p>
+            <a:r>
+              <a:rPr lang="es-ES" dirty="0"/>
+              <a:t>    </a:t>
+            </a:r>
+            <a:r>
+              <a:rPr lang="es-ES" dirty="0" err="1"/>
+              <a:t>animal.hablar</a:t>
+            </a:r>
+            <a:r>
+              <a:rPr lang="es-ES" dirty="0" smtClean="0"/>
+              <a:t>()</a:t>
+            </a:r>
+          </a:p>
+          <a:p>
+            <a:endParaRPr lang="es-ES" dirty="0"/>
+          </a:p>
+          <a:p>
+            <a:r>
+              <a:rPr lang="es-ES" b="1" dirty="0" smtClean="0"/>
+              <a:t>Resultado:</a:t>
+            </a:r>
+          </a:p>
+          <a:p>
+            <a:pPr lvl="1"/>
+            <a:r>
+              <a:rPr lang="es-ES" dirty="0"/>
+              <a:t>Guau</a:t>
+            </a:r>
+          </a:p>
+          <a:p>
+            <a:pPr lvl="1"/>
+            <a:r>
+              <a:rPr lang="es-ES" dirty="0" smtClean="0"/>
+              <a:t>Miau</a:t>
+            </a:r>
+          </a:p>
+          <a:p>
+            <a:pPr lvl="1"/>
+            <a:r>
+              <a:rPr lang="es-ES" b="1" dirty="0"/>
+              <a:t>No importa el tipo del objeto; ambos responden al mensaje hablar</a:t>
+            </a:r>
+            <a:r>
+              <a:rPr lang="es-ES" b="1" dirty="0" smtClean="0"/>
+              <a:t>().</a:t>
+            </a:r>
+            <a:endParaRPr lang="es-ES" dirty="0" smtClean="0"/>
+          </a:p>
+          <a:p>
+            <a:pPr lvl="1"/>
+            <a:endParaRPr lang="es-ES" dirty="0"/>
+          </a:p>
+          <a:p>
+            <a:endParaRPr lang="es-CL" dirty="0"/>
           </a:p>
         </p:txBody>
       </p:sp>
     </p:spTree>
     <p:extLst>
       <p:ext uri="{BB962C8B-B14F-4D97-AF65-F5344CB8AC3E}">
-        <p14:creationId xmlns:p14="http://schemas.microsoft.com/office/powerpoint/2010/main" val="2813096064"/>
+        <p14:creationId xmlns:p14="http://schemas.microsoft.com/office/powerpoint/2010/main" val="1465682095"/>
       </p:ext>
     </p:extLst>
   </p:cSld>
   <p:clrMapOvr>
     <a:masterClrMapping/>
   </p:clrMapOvr>
+  <p:timing>
+    <p:tnLst>
+      <p:par>
+        <p:cTn id="1" dur="indefinite" restart="never" nodeType="tmRoot"/>
+      </p:par>
+    </p:tnLst>
+  </p:timing>
 </p:sld>
 </file>
 
@@ -9758,6 +11212,2981 @@
           <a:bodyPr/>
           <a:lstStyle/>
           <a:p>
+            <a:r>
+              <a:rPr lang="es-ES" dirty="0"/>
+              <a:t>Propiedades de la Programación Orientada a Objetos</a:t>
+            </a:r>
+            <a:endParaRPr lang="es-CL" dirty="0"/>
+          </a:p>
+        </p:txBody>
+      </p:sp>
+      <p:sp>
+        <p:nvSpPr>
+          <p:cNvPr id="3" name="Marcador de contenido 2"/>
+          <p:cNvSpPr>
+            <a:spLocks noGrp="1"/>
+          </p:cNvSpPr>
+          <p:nvPr>
+            <p:ph idx="1"/>
+          </p:nvPr>
+        </p:nvSpPr>
+        <p:spPr/>
+        <p:txBody>
+          <a:bodyPr>
+            <a:normAutofit lnSpcReduction="10000"/>
+          </a:bodyPr>
+          <a:lstStyle/>
+          <a:p>
+            <a:r>
+              <a:rPr lang="es-ES" dirty="0"/>
+              <a:t>5. </a:t>
+            </a:r>
+            <a:r>
+              <a:rPr lang="es-ES" dirty="0" smtClean="0"/>
+              <a:t>Sobrecarga</a:t>
+            </a:r>
+          </a:p>
+          <a:p>
+            <a:pPr lvl="1"/>
+            <a:r>
+              <a:rPr lang="es-ES" dirty="0" smtClean="0"/>
+              <a:t>En </a:t>
+            </a:r>
+            <a:r>
+              <a:rPr lang="es-ES" dirty="0"/>
+              <a:t>Python no existe la sobrecarga tradicional de métodos como en Java o C++, donde se pueden definir varios métodos con el mismo nombre y distinta firma. </a:t>
+            </a:r>
+            <a:endParaRPr lang="es-ES" dirty="0" smtClean="0"/>
+          </a:p>
+          <a:p>
+            <a:r>
+              <a:rPr lang="es-ES" dirty="0" smtClean="0"/>
+              <a:t>Si </a:t>
+            </a:r>
+            <a:r>
+              <a:rPr lang="es-ES" dirty="0"/>
+              <a:t>se declara dos veces un método, la última definición reemplaza a la anterior</a:t>
+            </a:r>
+            <a:r>
+              <a:rPr lang="es-ES" dirty="0" smtClean="0"/>
+              <a:t>.</a:t>
+            </a:r>
+          </a:p>
+          <a:p>
+            <a:r>
+              <a:rPr lang="es-ES" dirty="0" smtClean="0"/>
+              <a:t>Sin </a:t>
+            </a:r>
+            <a:r>
+              <a:rPr lang="es-ES" dirty="0"/>
+              <a:t>embargo, Python ofrece alternativas</a:t>
+            </a:r>
+            <a:r>
+              <a:rPr lang="es-ES" dirty="0" smtClean="0"/>
+              <a:t>:</a:t>
+            </a:r>
+          </a:p>
+          <a:p>
+            <a:pPr lvl="1"/>
+            <a:r>
+              <a:rPr lang="es-ES" dirty="0" smtClean="0"/>
+              <a:t>Parámetros </a:t>
+            </a:r>
+            <a:r>
+              <a:rPr lang="es-ES" dirty="0"/>
+              <a:t>con valores por defecto</a:t>
+            </a:r>
+            <a:r>
+              <a:rPr lang="es-ES" dirty="0" smtClean="0"/>
+              <a:t>.</a:t>
+            </a:r>
+          </a:p>
+          <a:p>
+            <a:pPr lvl="1"/>
+            <a:r>
+              <a:rPr lang="es-ES" dirty="0" smtClean="0"/>
+              <a:t>*</a:t>
+            </a:r>
+            <a:r>
+              <a:rPr lang="es-ES" dirty="0" err="1"/>
+              <a:t>args</a:t>
+            </a:r>
+            <a:r>
+              <a:rPr lang="es-ES" dirty="0"/>
+              <a:t> y **</a:t>
+            </a:r>
+            <a:r>
+              <a:rPr lang="es-ES" dirty="0" err="1"/>
+              <a:t>kwargs</a:t>
+            </a:r>
+            <a:r>
+              <a:rPr lang="es-ES" dirty="0" smtClean="0"/>
+              <a:t>.</a:t>
+            </a:r>
+          </a:p>
+          <a:p>
+            <a:pPr lvl="1"/>
+            <a:r>
+              <a:rPr lang="es-ES" dirty="0" smtClean="0"/>
+              <a:t>Sobrecarga </a:t>
+            </a:r>
+            <a:r>
+              <a:rPr lang="es-ES" dirty="0"/>
+              <a:t>de operadores mediante métodos especiales (__</a:t>
+            </a:r>
+            <a:r>
+              <a:rPr lang="es-ES" dirty="0" err="1"/>
+              <a:t>add</a:t>
+            </a:r>
+            <a:r>
+              <a:rPr lang="es-ES" dirty="0"/>
+              <a:t>__, __</a:t>
+            </a:r>
+            <a:r>
+              <a:rPr lang="es-ES" dirty="0" err="1"/>
+              <a:t>eq</a:t>
+            </a:r>
+            <a:r>
+              <a:rPr lang="es-ES" dirty="0"/>
+              <a:t>__, etc.).</a:t>
+            </a:r>
+            <a:endParaRPr lang="es-CL" dirty="0"/>
+          </a:p>
+        </p:txBody>
+      </p:sp>
+    </p:spTree>
+    <p:extLst>
+      <p:ext uri="{BB962C8B-B14F-4D97-AF65-F5344CB8AC3E}">
+        <p14:creationId xmlns:p14="http://schemas.microsoft.com/office/powerpoint/2010/main" val="505346974"/>
+      </p:ext>
+    </p:extLst>
+  </p:cSld>
+  <p:clrMapOvr>
+    <a:masterClrMapping/>
+  </p:clrMapOvr>
+  <p:timing>
+    <p:tnLst>
+      <p:par>
+        <p:cTn id="1" dur="indefinite" restart="never" nodeType="tmRoot"/>
+      </p:par>
+    </p:tnLst>
+  </p:timing>
+</p:sld>
+</file>
+
+<file path=ppt/slides/slide41.xml><?xml version="1.0" encoding="utf-8"?>
+<p:sld xmlns:a="http://schemas.openxmlformats.org/drawingml/2006/main" xmlns:r="http://schemas.openxmlformats.org/officeDocument/2006/relationships" xmlns:p="http://schemas.openxmlformats.org/presentationml/2006/main">
+  <p:cSld>
+    <p:spTree>
+      <p:nvGrpSpPr>
+        <p:cNvPr id="1" name=""/>
+        <p:cNvGrpSpPr/>
+        <p:nvPr/>
+      </p:nvGrpSpPr>
+      <p:grpSpPr>
+        <a:xfrm>
+          <a:off x="0" y="0"/>
+          <a:ext cx="0" cy="0"/>
+          <a:chOff x="0" y="0"/>
+          <a:chExt cx="0" cy="0"/>
+        </a:xfrm>
+      </p:grpSpPr>
+      <p:sp>
+        <p:nvSpPr>
+          <p:cNvPr id="2" name="Título 1"/>
+          <p:cNvSpPr>
+            <a:spLocks noGrp="1"/>
+          </p:cNvSpPr>
+          <p:nvPr>
+            <p:ph type="title"/>
+          </p:nvPr>
+        </p:nvSpPr>
+        <p:spPr/>
+        <p:txBody>
+          <a:bodyPr/>
+          <a:lstStyle/>
+          <a:p>
+            <a:r>
+              <a:rPr lang="es-ES" dirty="0"/>
+              <a:t>Propiedades de la Programación Orientada a Objetos</a:t>
+            </a:r>
+            <a:endParaRPr lang="es-CL" dirty="0"/>
+          </a:p>
+        </p:txBody>
+      </p:sp>
+      <p:sp>
+        <p:nvSpPr>
+          <p:cNvPr id="3" name="Marcador de contenido 2"/>
+          <p:cNvSpPr>
+            <a:spLocks noGrp="1"/>
+          </p:cNvSpPr>
+          <p:nvPr>
+            <p:ph idx="1"/>
+          </p:nvPr>
+        </p:nvSpPr>
+        <p:spPr>
+          <a:xfrm>
+            <a:off x="720000" y="1825625"/>
+            <a:ext cx="10752000" cy="4695248"/>
+          </a:xfrm>
+        </p:spPr>
+        <p:txBody>
+          <a:bodyPr>
+            <a:normAutofit fontScale="62500" lnSpcReduction="20000"/>
+          </a:bodyPr>
+          <a:lstStyle/>
+          <a:p>
+            <a:r>
+              <a:rPr lang="es-ES" b="1" dirty="0"/>
+              <a:t>Ejemplo con parámetros por defecto</a:t>
+            </a:r>
+            <a:r>
+              <a:rPr lang="es-ES" b="1" dirty="0" smtClean="0"/>
+              <a:t>:</a:t>
+            </a:r>
+          </a:p>
+          <a:p>
+            <a:r>
+              <a:rPr lang="es-CL" dirty="0" err="1"/>
+              <a:t>class</a:t>
+            </a:r>
+            <a:r>
+              <a:rPr lang="es-CL" dirty="0"/>
+              <a:t> Calculadora:</a:t>
+            </a:r>
+          </a:p>
+          <a:p>
+            <a:r>
+              <a:rPr lang="es-CL" dirty="0"/>
+              <a:t>    </a:t>
+            </a:r>
+            <a:r>
+              <a:rPr lang="es-CL" dirty="0" err="1"/>
+              <a:t>def</a:t>
+            </a:r>
+            <a:r>
+              <a:rPr lang="es-CL" dirty="0"/>
+              <a:t> sumar(</a:t>
+            </a:r>
+            <a:r>
+              <a:rPr lang="es-CL" dirty="0" err="1"/>
+              <a:t>self</a:t>
+            </a:r>
+            <a:r>
+              <a:rPr lang="es-CL" dirty="0"/>
+              <a:t>, a, b=0, c=0):</a:t>
+            </a:r>
+          </a:p>
+          <a:p>
+            <a:r>
+              <a:rPr lang="es-CL" dirty="0"/>
+              <a:t>        </a:t>
+            </a:r>
+            <a:r>
+              <a:rPr lang="es-CL" dirty="0" err="1"/>
+              <a:t>return</a:t>
+            </a:r>
+            <a:r>
+              <a:rPr lang="es-CL" dirty="0"/>
+              <a:t> a + b + c</a:t>
+            </a:r>
+          </a:p>
+          <a:p>
+            <a:endParaRPr lang="es-CL" dirty="0"/>
+          </a:p>
+          <a:p>
+            <a:r>
+              <a:rPr lang="es-CL" dirty="0" err="1"/>
+              <a:t>calc</a:t>
+            </a:r>
+            <a:r>
+              <a:rPr lang="es-CL" dirty="0"/>
+              <a:t> = Calculadora()</a:t>
+            </a:r>
+          </a:p>
+          <a:p>
+            <a:endParaRPr lang="es-CL" dirty="0"/>
+          </a:p>
+          <a:p>
+            <a:r>
+              <a:rPr lang="es-CL" dirty="0" err="1"/>
+              <a:t>print</a:t>
+            </a:r>
+            <a:r>
+              <a:rPr lang="es-CL" dirty="0"/>
+              <a:t>(</a:t>
+            </a:r>
+            <a:r>
+              <a:rPr lang="es-CL" dirty="0" err="1"/>
+              <a:t>calc.sumar</a:t>
+            </a:r>
+            <a:r>
+              <a:rPr lang="es-CL" dirty="0"/>
+              <a:t>(5))</a:t>
+            </a:r>
+          </a:p>
+          <a:p>
+            <a:r>
+              <a:rPr lang="es-CL" dirty="0" err="1"/>
+              <a:t>print</a:t>
+            </a:r>
+            <a:r>
+              <a:rPr lang="es-CL" dirty="0"/>
+              <a:t>(</a:t>
+            </a:r>
+            <a:r>
+              <a:rPr lang="es-CL" dirty="0" err="1"/>
+              <a:t>calc.sumar</a:t>
+            </a:r>
+            <a:r>
+              <a:rPr lang="es-CL" dirty="0"/>
+              <a:t>(5, 3))</a:t>
+            </a:r>
+          </a:p>
+          <a:p>
+            <a:r>
+              <a:rPr lang="es-CL" dirty="0" err="1"/>
+              <a:t>print</a:t>
+            </a:r>
+            <a:r>
+              <a:rPr lang="es-CL" dirty="0"/>
+              <a:t>(</a:t>
+            </a:r>
+            <a:r>
+              <a:rPr lang="es-CL" dirty="0" err="1"/>
+              <a:t>calc.sumar</a:t>
+            </a:r>
+            <a:r>
+              <a:rPr lang="es-CL" dirty="0"/>
+              <a:t>(5, 3, 2</a:t>
+            </a:r>
+            <a:r>
+              <a:rPr lang="es-CL" dirty="0" smtClean="0"/>
+              <a:t>))</a:t>
+            </a:r>
+          </a:p>
+          <a:p>
+            <a:endParaRPr lang="es-CL" dirty="0"/>
+          </a:p>
+          <a:p>
+            <a:r>
+              <a:rPr lang="es-CL" dirty="0" smtClean="0"/>
+              <a:t>Resultado</a:t>
+            </a:r>
+          </a:p>
+          <a:p>
+            <a:pPr lvl="1"/>
+            <a:r>
+              <a:rPr lang="es-CL" dirty="0"/>
+              <a:t>5</a:t>
+            </a:r>
+          </a:p>
+          <a:p>
+            <a:pPr lvl="1"/>
+            <a:r>
+              <a:rPr lang="es-CL" dirty="0"/>
+              <a:t>8</a:t>
+            </a:r>
+          </a:p>
+          <a:p>
+            <a:pPr lvl="1"/>
+            <a:r>
+              <a:rPr lang="es-CL" dirty="0"/>
+              <a:t>10</a:t>
+            </a:r>
+          </a:p>
+        </p:txBody>
+      </p:sp>
+    </p:spTree>
+    <p:extLst>
+      <p:ext uri="{BB962C8B-B14F-4D97-AF65-F5344CB8AC3E}">
+        <p14:creationId xmlns:p14="http://schemas.microsoft.com/office/powerpoint/2010/main" val="1877416231"/>
+      </p:ext>
+    </p:extLst>
+  </p:cSld>
+  <p:clrMapOvr>
+    <a:masterClrMapping/>
+  </p:clrMapOvr>
+</p:sld>
+</file>
+
+<file path=ppt/slides/slide42.xml><?xml version="1.0" encoding="utf-8"?>
+<p:sld xmlns:a="http://schemas.openxmlformats.org/drawingml/2006/main" xmlns:r="http://schemas.openxmlformats.org/officeDocument/2006/relationships" xmlns:p="http://schemas.openxmlformats.org/presentationml/2006/main">
+  <p:cSld>
+    <p:spTree>
+      <p:nvGrpSpPr>
+        <p:cNvPr id="1" name=""/>
+        <p:cNvGrpSpPr/>
+        <p:nvPr/>
+      </p:nvGrpSpPr>
+      <p:grpSpPr>
+        <a:xfrm>
+          <a:off x="0" y="0"/>
+          <a:ext cx="0" cy="0"/>
+          <a:chOff x="0" y="0"/>
+          <a:chExt cx="0" cy="0"/>
+        </a:xfrm>
+      </p:grpSpPr>
+      <p:sp>
+        <p:nvSpPr>
+          <p:cNvPr id="2" name="Título 1"/>
+          <p:cNvSpPr>
+            <a:spLocks noGrp="1"/>
+          </p:cNvSpPr>
+          <p:nvPr>
+            <p:ph type="title"/>
+          </p:nvPr>
+        </p:nvSpPr>
+        <p:spPr/>
+        <p:txBody>
+          <a:bodyPr/>
+          <a:lstStyle/>
+          <a:p>
+            <a:r>
+              <a:rPr lang="es-ES" dirty="0"/>
+              <a:t>Propiedades de la Programación Orientada a Objetos</a:t>
+            </a:r>
+            <a:endParaRPr lang="es-CL" dirty="0"/>
+          </a:p>
+        </p:txBody>
+      </p:sp>
+      <p:sp>
+        <p:nvSpPr>
+          <p:cNvPr id="3" name="Marcador de contenido 2"/>
+          <p:cNvSpPr>
+            <a:spLocks noGrp="1"/>
+          </p:cNvSpPr>
+          <p:nvPr>
+            <p:ph idx="1"/>
+          </p:nvPr>
+        </p:nvSpPr>
+        <p:spPr>
+          <a:xfrm>
+            <a:off x="720000" y="1825625"/>
+            <a:ext cx="10752000" cy="4806084"/>
+          </a:xfrm>
+        </p:spPr>
+        <p:txBody>
+          <a:bodyPr>
+            <a:normAutofit fontScale="40000" lnSpcReduction="20000"/>
+          </a:bodyPr>
+          <a:lstStyle/>
+          <a:p>
+            <a:r>
+              <a:rPr lang="en-US" b="1" dirty="0" err="1"/>
+              <a:t>Ejemplo</a:t>
+            </a:r>
+            <a:r>
+              <a:rPr lang="en-US" b="1" dirty="0"/>
+              <a:t> de </a:t>
+            </a:r>
+            <a:r>
+              <a:rPr lang="en-US" b="1" dirty="0" err="1"/>
+              <a:t>sobrecarga</a:t>
+            </a:r>
+            <a:r>
+              <a:rPr lang="en-US" b="1" dirty="0"/>
+              <a:t> de </a:t>
+            </a:r>
+            <a:r>
+              <a:rPr lang="en-US" b="1" dirty="0" err="1"/>
+              <a:t>operadores</a:t>
+            </a:r>
+            <a:r>
+              <a:rPr lang="en-US" b="1" dirty="0" smtClean="0"/>
+              <a:t>:</a:t>
+            </a:r>
+          </a:p>
+          <a:p>
+            <a:r>
+              <a:rPr lang="es-CL" dirty="0" err="1"/>
+              <a:t>class</a:t>
+            </a:r>
+            <a:r>
+              <a:rPr lang="es-CL" dirty="0"/>
+              <a:t> Punto:</a:t>
+            </a:r>
+          </a:p>
+          <a:p>
+            <a:r>
+              <a:rPr lang="es-CL" dirty="0"/>
+              <a:t>    </a:t>
+            </a:r>
+            <a:r>
+              <a:rPr lang="es-CL" dirty="0" err="1"/>
+              <a:t>def</a:t>
+            </a:r>
+            <a:r>
+              <a:rPr lang="es-CL" dirty="0"/>
+              <a:t> __</a:t>
+            </a:r>
+            <a:r>
+              <a:rPr lang="es-CL" dirty="0" err="1"/>
+              <a:t>init</a:t>
+            </a:r>
+            <a:r>
+              <a:rPr lang="es-CL" dirty="0"/>
+              <a:t>__(</a:t>
+            </a:r>
+            <a:r>
+              <a:rPr lang="es-CL" dirty="0" err="1"/>
+              <a:t>self</a:t>
+            </a:r>
+            <a:r>
+              <a:rPr lang="es-CL" dirty="0"/>
+              <a:t>, x, y):</a:t>
+            </a:r>
+          </a:p>
+          <a:p>
+            <a:r>
+              <a:rPr lang="es-CL" dirty="0"/>
+              <a:t>        </a:t>
+            </a:r>
+            <a:r>
+              <a:rPr lang="es-CL" dirty="0" err="1"/>
+              <a:t>self.x</a:t>
+            </a:r>
+            <a:r>
+              <a:rPr lang="es-CL" dirty="0"/>
+              <a:t> = x</a:t>
+            </a:r>
+          </a:p>
+          <a:p>
+            <a:r>
+              <a:rPr lang="es-CL" dirty="0"/>
+              <a:t>        </a:t>
+            </a:r>
+            <a:r>
+              <a:rPr lang="es-CL" dirty="0" err="1"/>
+              <a:t>self.y</a:t>
+            </a:r>
+            <a:r>
+              <a:rPr lang="es-CL" dirty="0"/>
+              <a:t> = y</a:t>
+            </a:r>
+          </a:p>
+          <a:p>
+            <a:endParaRPr lang="es-CL" dirty="0"/>
+          </a:p>
+          <a:p>
+            <a:r>
+              <a:rPr lang="es-CL" dirty="0"/>
+              <a:t>    </a:t>
+            </a:r>
+            <a:r>
+              <a:rPr lang="es-CL" dirty="0" err="1"/>
+              <a:t>def</a:t>
+            </a:r>
+            <a:r>
+              <a:rPr lang="es-CL" dirty="0"/>
+              <a:t> __</a:t>
+            </a:r>
+            <a:r>
+              <a:rPr lang="es-CL" dirty="0" err="1"/>
+              <a:t>add</a:t>
+            </a:r>
+            <a:r>
+              <a:rPr lang="es-CL" dirty="0"/>
+              <a:t>__(</a:t>
+            </a:r>
+            <a:r>
+              <a:rPr lang="es-CL" dirty="0" err="1"/>
+              <a:t>self</a:t>
+            </a:r>
+            <a:r>
+              <a:rPr lang="es-CL" dirty="0"/>
+              <a:t>, otro):</a:t>
+            </a:r>
+          </a:p>
+          <a:p>
+            <a:r>
+              <a:rPr lang="es-CL" dirty="0"/>
+              <a:t>        </a:t>
+            </a:r>
+            <a:r>
+              <a:rPr lang="es-CL" dirty="0" err="1"/>
+              <a:t>return</a:t>
+            </a:r>
+            <a:r>
+              <a:rPr lang="es-CL" dirty="0"/>
+              <a:t> Punto(</a:t>
+            </a:r>
+            <a:r>
+              <a:rPr lang="es-CL" dirty="0" err="1"/>
+              <a:t>self.x</a:t>
+            </a:r>
+            <a:r>
+              <a:rPr lang="es-CL" dirty="0"/>
+              <a:t> + </a:t>
+            </a:r>
+            <a:r>
+              <a:rPr lang="es-CL" dirty="0" err="1"/>
+              <a:t>otro.x</a:t>
+            </a:r>
+            <a:r>
+              <a:rPr lang="es-CL" dirty="0"/>
+              <a:t>, </a:t>
+            </a:r>
+            <a:r>
+              <a:rPr lang="es-CL" dirty="0" err="1"/>
+              <a:t>self.y</a:t>
+            </a:r>
+            <a:r>
+              <a:rPr lang="es-CL" dirty="0"/>
+              <a:t> + </a:t>
+            </a:r>
+            <a:r>
+              <a:rPr lang="es-CL" dirty="0" err="1"/>
+              <a:t>otro.y</a:t>
+            </a:r>
+            <a:r>
+              <a:rPr lang="es-CL" dirty="0"/>
+              <a:t>)</a:t>
+            </a:r>
+          </a:p>
+          <a:p>
+            <a:endParaRPr lang="es-CL" dirty="0"/>
+          </a:p>
+          <a:p>
+            <a:r>
+              <a:rPr lang="es-CL" dirty="0"/>
+              <a:t>    </a:t>
+            </a:r>
+            <a:r>
+              <a:rPr lang="es-CL" dirty="0" err="1"/>
+              <a:t>def</a:t>
+            </a:r>
+            <a:r>
+              <a:rPr lang="es-CL" dirty="0"/>
+              <a:t> __</a:t>
+            </a:r>
+            <a:r>
+              <a:rPr lang="es-CL" dirty="0" err="1"/>
+              <a:t>str</a:t>
+            </a:r>
+            <a:r>
+              <a:rPr lang="es-CL" dirty="0"/>
+              <a:t>__(</a:t>
+            </a:r>
+            <a:r>
+              <a:rPr lang="es-CL" dirty="0" err="1"/>
+              <a:t>self</a:t>
+            </a:r>
+            <a:r>
+              <a:rPr lang="es-CL" dirty="0"/>
+              <a:t>):</a:t>
+            </a:r>
+          </a:p>
+          <a:p>
+            <a:r>
+              <a:rPr lang="es-CL" dirty="0"/>
+              <a:t>        </a:t>
+            </a:r>
+            <a:r>
+              <a:rPr lang="es-CL" dirty="0" err="1"/>
+              <a:t>return</a:t>
+            </a:r>
+            <a:r>
+              <a:rPr lang="es-CL" dirty="0"/>
+              <a:t> f"({</a:t>
+            </a:r>
+            <a:r>
+              <a:rPr lang="es-CL" dirty="0" err="1"/>
+              <a:t>self.x</a:t>
+            </a:r>
+            <a:r>
+              <a:rPr lang="es-CL" dirty="0"/>
+              <a:t>}, {</a:t>
+            </a:r>
+            <a:r>
+              <a:rPr lang="es-CL" dirty="0" err="1"/>
+              <a:t>self.y</a:t>
+            </a:r>
+            <a:r>
+              <a:rPr lang="es-CL" dirty="0"/>
+              <a:t>})"</a:t>
+            </a:r>
+          </a:p>
+          <a:p>
+            <a:endParaRPr lang="es-CL" dirty="0"/>
+          </a:p>
+          <a:p>
+            <a:r>
+              <a:rPr lang="es-CL" dirty="0"/>
+              <a:t>p1 = Punto(2, 3)</a:t>
+            </a:r>
+          </a:p>
+          <a:p>
+            <a:r>
+              <a:rPr lang="es-CL" dirty="0"/>
+              <a:t>p2 = Punto(4, 5)</a:t>
+            </a:r>
+          </a:p>
+          <a:p>
+            <a:endParaRPr lang="es-CL" dirty="0"/>
+          </a:p>
+          <a:p>
+            <a:r>
+              <a:rPr lang="es-CL" dirty="0" err="1"/>
+              <a:t>print</a:t>
+            </a:r>
+            <a:r>
+              <a:rPr lang="es-CL" dirty="0"/>
+              <a:t>(p1 + p2</a:t>
+            </a:r>
+            <a:r>
+              <a:rPr lang="es-CL" dirty="0" smtClean="0"/>
+              <a:t>)</a:t>
+            </a:r>
+          </a:p>
+          <a:p>
+            <a:endParaRPr lang="es-CL" dirty="0"/>
+          </a:p>
+          <a:p>
+            <a:r>
+              <a:rPr lang="es-CL" dirty="0" smtClean="0"/>
+              <a:t>Resultado</a:t>
+            </a:r>
+          </a:p>
+          <a:p>
+            <a:pPr lvl="1"/>
+            <a:r>
+              <a:rPr lang="es-CL" dirty="0"/>
+              <a:t>(6, 8)</a:t>
+            </a:r>
+          </a:p>
+        </p:txBody>
+      </p:sp>
+    </p:spTree>
+    <p:extLst>
+      <p:ext uri="{BB962C8B-B14F-4D97-AF65-F5344CB8AC3E}">
+        <p14:creationId xmlns:p14="http://schemas.microsoft.com/office/powerpoint/2010/main" val="2980675475"/>
+      </p:ext>
+    </p:extLst>
+  </p:cSld>
+  <p:clrMapOvr>
+    <a:masterClrMapping/>
+  </p:clrMapOvr>
+</p:sld>
+</file>
+
+<file path=ppt/slides/slide43.xml><?xml version="1.0" encoding="utf-8"?>
+<p:sld xmlns:a="http://schemas.openxmlformats.org/drawingml/2006/main" xmlns:r="http://schemas.openxmlformats.org/officeDocument/2006/relationships" xmlns:p="http://schemas.openxmlformats.org/presentationml/2006/main">
+  <p:cSld>
+    <p:spTree>
+      <p:nvGrpSpPr>
+        <p:cNvPr id="1" name=""/>
+        <p:cNvGrpSpPr/>
+        <p:nvPr/>
+      </p:nvGrpSpPr>
+      <p:grpSpPr>
+        <a:xfrm>
+          <a:off x="0" y="0"/>
+          <a:ext cx="0" cy="0"/>
+          <a:chOff x="0" y="0"/>
+          <a:chExt cx="0" cy="0"/>
+        </a:xfrm>
+      </p:grpSpPr>
+      <p:sp>
+        <p:nvSpPr>
+          <p:cNvPr id="2" name="Título 1"/>
+          <p:cNvSpPr>
+            <a:spLocks noGrp="1"/>
+          </p:cNvSpPr>
+          <p:nvPr>
+            <p:ph type="title"/>
+          </p:nvPr>
+        </p:nvSpPr>
+        <p:spPr/>
+        <p:txBody>
+          <a:bodyPr/>
+          <a:lstStyle/>
+          <a:p>
+            <a:r>
+              <a:rPr lang="en-US" dirty="0" err="1"/>
+              <a:t>Ejemplo</a:t>
+            </a:r>
+            <a:r>
+              <a:rPr lang="en-US" dirty="0"/>
+              <a:t> </a:t>
+            </a:r>
+            <a:r>
+              <a:rPr lang="en-US" dirty="0" err="1"/>
+              <a:t>Integrador</a:t>
+            </a:r>
+            <a:endParaRPr lang="es-CL" dirty="0"/>
+          </a:p>
+        </p:txBody>
+      </p:sp>
+      <p:sp>
+        <p:nvSpPr>
+          <p:cNvPr id="3" name="Marcador de contenido 2"/>
+          <p:cNvSpPr>
+            <a:spLocks noGrp="1"/>
+          </p:cNvSpPr>
+          <p:nvPr>
+            <p:ph idx="1"/>
+          </p:nvPr>
+        </p:nvSpPr>
+        <p:spPr>
+          <a:xfrm>
+            <a:off x="720000" y="1825625"/>
+            <a:ext cx="3658036" cy="4351338"/>
+          </a:xfrm>
+        </p:spPr>
+        <p:txBody>
+          <a:bodyPr>
+            <a:normAutofit fontScale="40000" lnSpcReduction="20000"/>
+          </a:bodyPr>
+          <a:lstStyle/>
+          <a:p>
+            <a:r>
+              <a:rPr lang="es-CL" dirty="0" err="1"/>
+              <a:t>class</a:t>
+            </a:r>
+            <a:r>
+              <a:rPr lang="es-CL" dirty="0"/>
+              <a:t> Persona:</a:t>
+            </a:r>
+          </a:p>
+          <a:p>
+            <a:endParaRPr lang="es-CL" dirty="0"/>
+          </a:p>
+          <a:p>
+            <a:r>
+              <a:rPr lang="es-CL" dirty="0"/>
+              <a:t>    </a:t>
+            </a:r>
+            <a:r>
+              <a:rPr lang="es-CL" dirty="0" err="1"/>
+              <a:t>def</a:t>
+            </a:r>
+            <a:r>
+              <a:rPr lang="es-CL" dirty="0"/>
+              <a:t> __</a:t>
+            </a:r>
+            <a:r>
+              <a:rPr lang="es-CL" dirty="0" err="1"/>
+              <a:t>init</a:t>
+            </a:r>
+            <a:r>
+              <a:rPr lang="es-CL" dirty="0"/>
+              <a:t>__(</a:t>
+            </a:r>
+            <a:r>
+              <a:rPr lang="es-CL" dirty="0" err="1"/>
+              <a:t>self,nombre</a:t>
+            </a:r>
+            <a:r>
+              <a:rPr lang="es-CL" dirty="0"/>
+              <a:t>):</a:t>
+            </a:r>
+          </a:p>
+          <a:p>
+            <a:r>
+              <a:rPr lang="es-CL" dirty="0"/>
+              <a:t>        </a:t>
+            </a:r>
+            <a:r>
+              <a:rPr lang="es-CL" dirty="0" err="1"/>
+              <a:t>self.nombre</a:t>
+            </a:r>
+            <a:r>
+              <a:rPr lang="es-CL" dirty="0"/>
+              <a:t> = nombre</a:t>
+            </a:r>
+          </a:p>
+          <a:p>
+            <a:endParaRPr lang="es-CL" dirty="0"/>
+          </a:p>
+          <a:p>
+            <a:r>
+              <a:rPr lang="es-CL" dirty="0"/>
+              <a:t>    </a:t>
+            </a:r>
+            <a:r>
+              <a:rPr lang="es-CL" dirty="0" err="1"/>
+              <a:t>def</a:t>
+            </a:r>
+            <a:r>
+              <a:rPr lang="es-CL" dirty="0"/>
+              <a:t> hablar(</a:t>
+            </a:r>
+            <a:r>
+              <a:rPr lang="es-CL" dirty="0" err="1"/>
+              <a:t>self</a:t>
+            </a:r>
+            <a:r>
+              <a:rPr lang="es-CL" dirty="0"/>
+              <a:t>):</a:t>
+            </a:r>
+          </a:p>
+          <a:p>
+            <a:r>
+              <a:rPr lang="es-CL" dirty="0"/>
+              <a:t>        </a:t>
+            </a:r>
+            <a:r>
+              <a:rPr lang="es-CL" dirty="0" err="1"/>
+              <a:t>print</a:t>
+            </a:r>
+            <a:r>
+              <a:rPr lang="es-CL" dirty="0"/>
+              <a:t>("Hola")</a:t>
+            </a:r>
+          </a:p>
+          <a:p>
+            <a:endParaRPr lang="es-CL" dirty="0"/>
+          </a:p>
+          <a:p>
+            <a:r>
+              <a:rPr lang="es-CL" dirty="0" err="1"/>
+              <a:t>class</a:t>
+            </a:r>
+            <a:r>
+              <a:rPr lang="es-CL" dirty="0"/>
+              <a:t> Profesor(Persona):</a:t>
+            </a:r>
+          </a:p>
+          <a:p>
+            <a:endParaRPr lang="es-CL" dirty="0"/>
+          </a:p>
+          <a:p>
+            <a:r>
+              <a:rPr lang="es-CL" dirty="0"/>
+              <a:t>    </a:t>
+            </a:r>
+            <a:r>
+              <a:rPr lang="es-CL" dirty="0" err="1"/>
+              <a:t>def</a:t>
+            </a:r>
+            <a:r>
+              <a:rPr lang="es-CL" dirty="0"/>
+              <a:t> enseñar(</a:t>
+            </a:r>
+            <a:r>
+              <a:rPr lang="es-CL" dirty="0" err="1"/>
+              <a:t>self</a:t>
+            </a:r>
+            <a:r>
+              <a:rPr lang="es-CL" dirty="0"/>
+              <a:t>):</a:t>
+            </a:r>
+          </a:p>
+          <a:p>
+            <a:r>
+              <a:rPr lang="es-CL" dirty="0"/>
+              <a:t>        </a:t>
+            </a:r>
+            <a:r>
+              <a:rPr lang="es-CL" dirty="0" err="1"/>
+              <a:t>print</a:t>
+            </a:r>
+            <a:r>
+              <a:rPr lang="es-CL" dirty="0"/>
+              <a:t>("Estoy enseñando Python")</a:t>
+            </a:r>
+          </a:p>
+          <a:p>
+            <a:endParaRPr lang="es-CL" dirty="0"/>
+          </a:p>
+          <a:p>
+            <a:r>
+              <a:rPr lang="es-CL" dirty="0" err="1"/>
+              <a:t>class</a:t>
+            </a:r>
+            <a:r>
+              <a:rPr lang="es-CL" dirty="0"/>
+              <a:t> Estudiante(Persona):</a:t>
+            </a:r>
+          </a:p>
+          <a:p>
+            <a:endParaRPr lang="es-CL" dirty="0"/>
+          </a:p>
+          <a:p>
+            <a:r>
+              <a:rPr lang="es-CL" dirty="0"/>
+              <a:t>    </a:t>
+            </a:r>
+            <a:r>
+              <a:rPr lang="es-CL" dirty="0" err="1"/>
+              <a:t>def</a:t>
+            </a:r>
+            <a:r>
+              <a:rPr lang="es-CL" dirty="0"/>
+              <a:t> estudiar(</a:t>
+            </a:r>
+            <a:r>
+              <a:rPr lang="es-CL" dirty="0" err="1"/>
+              <a:t>self</a:t>
+            </a:r>
+            <a:r>
+              <a:rPr lang="es-CL" dirty="0"/>
+              <a:t>):</a:t>
+            </a:r>
+          </a:p>
+          <a:p>
+            <a:r>
+              <a:rPr lang="es-CL" dirty="0"/>
+              <a:t>        </a:t>
+            </a:r>
+            <a:r>
+              <a:rPr lang="es-CL" dirty="0" err="1"/>
+              <a:t>print</a:t>
+            </a:r>
+            <a:r>
+              <a:rPr lang="es-CL" dirty="0"/>
+              <a:t>("Estoy estudiando</a:t>
+            </a:r>
+            <a:r>
+              <a:rPr lang="es-CL" dirty="0" smtClean="0"/>
+              <a:t>")</a:t>
+            </a:r>
+          </a:p>
+          <a:p>
+            <a:endParaRPr lang="es-CL" dirty="0"/>
+          </a:p>
+          <a:p>
+            <a:pPr marL="0" indent="0">
+              <a:buNone/>
+            </a:pPr>
+            <a:endParaRPr lang="es-CL" dirty="0"/>
+          </a:p>
+        </p:txBody>
+      </p:sp>
+      <p:sp>
+        <p:nvSpPr>
+          <p:cNvPr id="4" name="Marcador de contenido 2"/>
+          <p:cNvSpPr txBox="1">
+            <a:spLocks/>
+          </p:cNvSpPr>
+          <p:nvPr/>
+        </p:nvSpPr>
+        <p:spPr>
+          <a:xfrm>
+            <a:off x="5573709" y="1825625"/>
+            <a:ext cx="3658036" cy="4351338"/>
+          </a:xfrm>
+          <a:prstGeom prst="rect">
+            <a:avLst/>
+          </a:prstGeom>
+        </p:spPr>
+        <p:txBody>
+          <a:bodyPr vert="horz" lIns="91440" tIns="45720" rIns="91440" bIns="45720" rtlCol="0">
+            <a:normAutofit fontScale="55000" lnSpcReduction="20000"/>
+          </a:bodyPr>
+          <a:lstStyle>
+            <a:lvl1pPr marL="228600" indent="-228600" algn="l" defTabSz="914400" rtl="0" eaLnBrk="1" latinLnBrk="0" hangingPunct="1">
+              <a:lnSpc>
+                <a:spcPct val="90000"/>
+              </a:lnSpc>
+              <a:spcBef>
+                <a:spcPts val="1000"/>
+              </a:spcBef>
+              <a:buFont typeface="Arial" panose="020B0604020202020204" pitchFamily="34" charset="0"/>
+              <a:buChar char="•"/>
+              <a:defRPr sz="2800" kern="1200">
+                <a:solidFill>
+                  <a:schemeClr val="tx1">
+                    <a:lumMod val="75000"/>
+                    <a:lumOff val="25000"/>
+                  </a:schemeClr>
+                </a:solidFill>
+                <a:latin typeface="Avenir Light" panose="020B0402020203020204"/>
+                <a:ea typeface="+mn-ea"/>
+                <a:cs typeface="+mn-cs"/>
+              </a:defRPr>
+            </a:lvl1pPr>
+            <a:lvl2pPr marL="685800" indent="-228600" algn="l" defTabSz="914400" rtl="0" eaLnBrk="1" latinLnBrk="0" hangingPunct="1">
+              <a:lnSpc>
+                <a:spcPct val="90000"/>
+              </a:lnSpc>
+              <a:spcBef>
+                <a:spcPts val="500"/>
+              </a:spcBef>
+              <a:buFont typeface="Arial" panose="020B0604020202020204" pitchFamily="34" charset="0"/>
+              <a:buChar char="•"/>
+              <a:defRPr sz="2400" kern="1200">
+                <a:solidFill>
+                  <a:schemeClr val="tx1">
+                    <a:lumMod val="75000"/>
+                    <a:lumOff val="25000"/>
+                  </a:schemeClr>
+                </a:solidFill>
+                <a:latin typeface="Avenir Light" panose="020B0402020203020204"/>
+                <a:ea typeface="+mn-ea"/>
+                <a:cs typeface="+mn-cs"/>
+              </a:defRPr>
+            </a:lvl2pPr>
+            <a:lvl3pPr marL="1143000" indent="-228600" algn="l" defTabSz="914400" rtl="0" eaLnBrk="1" latinLnBrk="0" hangingPunct="1">
+              <a:lnSpc>
+                <a:spcPct val="90000"/>
+              </a:lnSpc>
+              <a:spcBef>
+                <a:spcPts val="500"/>
+              </a:spcBef>
+              <a:buFont typeface="Arial" panose="020B0604020202020204" pitchFamily="34" charset="0"/>
+              <a:buChar char="•"/>
+              <a:defRPr sz="2000" kern="1200">
+                <a:solidFill>
+                  <a:schemeClr val="tx1">
+                    <a:lumMod val="75000"/>
+                    <a:lumOff val="25000"/>
+                  </a:schemeClr>
+                </a:solidFill>
+                <a:latin typeface="Avenir Light" panose="020B0402020203020204"/>
+                <a:ea typeface="+mn-ea"/>
+                <a:cs typeface="+mn-cs"/>
+              </a:defRPr>
+            </a:lvl3pPr>
+            <a:lvl4pPr marL="1600200" indent="-228600" algn="l" defTabSz="914400" rtl="0" eaLnBrk="1" latinLnBrk="0" hangingPunct="1">
+              <a:lnSpc>
+                <a:spcPct val="90000"/>
+              </a:lnSpc>
+              <a:spcBef>
+                <a:spcPts val="500"/>
+              </a:spcBef>
+              <a:buFont typeface="Arial" panose="020B0604020202020204" pitchFamily="34" charset="0"/>
+              <a:buChar char="•"/>
+              <a:defRPr sz="1800" kern="1200">
+                <a:solidFill>
+                  <a:schemeClr val="tx1">
+                    <a:lumMod val="75000"/>
+                    <a:lumOff val="25000"/>
+                  </a:schemeClr>
+                </a:solidFill>
+                <a:latin typeface="Avenir Light" panose="020B0402020203020204"/>
+                <a:ea typeface="+mn-ea"/>
+                <a:cs typeface="+mn-cs"/>
+              </a:defRPr>
+            </a:lvl4pPr>
+            <a:lvl5pPr marL="2057400" indent="-228600" algn="l" defTabSz="914400" rtl="0" eaLnBrk="1" latinLnBrk="0" hangingPunct="1">
+              <a:lnSpc>
+                <a:spcPct val="90000"/>
+              </a:lnSpc>
+              <a:spcBef>
+                <a:spcPts val="500"/>
+              </a:spcBef>
+              <a:buFont typeface="Arial" panose="020B0604020202020204" pitchFamily="34" charset="0"/>
+              <a:buChar char="•"/>
+              <a:defRPr sz="1800" kern="1200">
+                <a:solidFill>
+                  <a:schemeClr val="tx1">
+                    <a:lumMod val="75000"/>
+                    <a:lumOff val="25000"/>
+                  </a:schemeClr>
+                </a:solidFill>
+                <a:latin typeface="Avenir Light" panose="020B0402020203020204"/>
+                <a:ea typeface="+mn-ea"/>
+                <a:cs typeface="+mn-cs"/>
+              </a:defRPr>
+            </a:lvl5pPr>
+            <a:lvl6pPr marL="2514600" indent="-228600" algn="l" defTabSz="914400" rtl="0" eaLnBrk="1" latinLnBrk="0" hangingPunct="1">
+              <a:lnSpc>
+                <a:spcPct val="90000"/>
+              </a:lnSpc>
+              <a:spcBef>
+                <a:spcPts val="500"/>
+              </a:spcBef>
+              <a:buFont typeface="Arial" panose="020B0604020202020204" pitchFamily="34" charset="0"/>
+              <a:buChar char="•"/>
+              <a:defRPr sz="1800" kern="1200">
+                <a:solidFill>
+                  <a:schemeClr val="tx1"/>
+                </a:solidFill>
+                <a:latin typeface="+mn-lt"/>
+                <a:ea typeface="+mn-ea"/>
+                <a:cs typeface="+mn-cs"/>
+              </a:defRPr>
+            </a:lvl6pPr>
+            <a:lvl7pPr marL="2971800" indent="-228600" algn="l" defTabSz="914400" rtl="0" eaLnBrk="1" latinLnBrk="0" hangingPunct="1">
+              <a:lnSpc>
+                <a:spcPct val="90000"/>
+              </a:lnSpc>
+              <a:spcBef>
+                <a:spcPts val="500"/>
+              </a:spcBef>
+              <a:buFont typeface="Arial" panose="020B0604020202020204" pitchFamily="34" charset="0"/>
+              <a:buChar char="•"/>
+              <a:defRPr sz="1800" kern="1200">
+                <a:solidFill>
+                  <a:schemeClr val="tx1"/>
+                </a:solidFill>
+                <a:latin typeface="+mn-lt"/>
+                <a:ea typeface="+mn-ea"/>
+                <a:cs typeface="+mn-cs"/>
+              </a:defRPr>
+            </a:lvl7pPr>
+            <a:lvl8pPr marL="3429000" indent="-228600" algn="l" defTabSz="914400" rtl="0" eaLnBrk="1" latinLnBrk="0" hangingPunct="1">
+              <a:lnSpc>
+                <a:spcPct val="90000"/>
+              </a:lnSpc>
+              <a:spcBef>
+                <a:spcPts val="500"/>
+              </a:spcBef>
+              <a:buFont typeface="Arial" panose="020B0604020202020204" pitchFamily="34" charset="0"/>
+              <a:buChar char="•"/>
+              <a:defRPr sz="1800" kern="1200">
+                <a:solidFill>
+                  <a:schemeClr val="tx1"/>
+                </a:solidFill>
+                <a:latin typeface="+mn-lt"/>
+                <a:ea typeface="+mn-ea"/>
+                <a:cs typeface="+mn-cs"/>
+              </a:defRPr>
+            </a:lvl8pPr>
+            <a:lvl9pPr marL="3886200" indent="-228600" algn="l" defTabSz="914400" rtl="0" eaLnBrk="1" latinLnBrk="0" hangingPunct="1">
+              <a:lnSpc>
+                <a:spcPct val="90000"/>
+              </a:lnSpc>
+              <a:spcBef>
+                <a:spcPts val="500"/>
+              </a:spcBef>
+              <a:buFont typeface="Arial" panose="020B0604020202020204" pitchFamily="34" charset="0"/>
+              <a:buChar char="•"/>
+              <a:defRPr sz="1800" kern="1200">
+                <a:solidFill>
+                  <a:schemeClr val="tx1"/>
+                </a:solidFill>
+                <a:latin typeface="+mn-lt"/>
+                <a:ea typeface="+mn-ea"/>
+                <a:cs typeface="+mn-cs"/>
+              </a:defRPr>
+            </a:lvl9pPr>
+          </a:lstStyle>
+          <a:p>
+            <a:r>
+              <a:rPr lang="es-CL" b="1" dirty="0" smtClean="0"/>
+              <a:t>Uso</a:t>
+            </a:r>
+          </a:p>
+          <a:p>
+            <a:r>
+              <a:rPr lang="es-ES" dirty="0"/>
+              <a:t>profe = Profesor("Carlos")</a:t>
+            </a:r>
+          </a:p>
+          <a:p>
+            <a:r>
+              <a:rPr lang="es-ES" dirty="0"/>
+              <a:t>alumno = Estudiante("Ana")</a:t>
+            </a:r>
+          </a:p>
+          <a:p>
+            <a:endParaRPr lang="es-ES" dirty="0"/>
+          </a:p>
+          <a:p>
+            <a:r>
+              <a:rPr lang="es-ES" dirty="0" err="1"/>
+              <a:t>profe.hablar</a:t>
+            </a:r>
+            <a:r>
+              <a:rPr lang="es-ES" dirty="0"/>
+              <a:t>()</a:t>
+            </a:r>
+          </a:p>
+          <a:p>
+            <a:r>
+              <a:rPr lang="es-ES" dirty="0" err="1"/>
+              <a:t>profe.enseñar</a:t>
+            </a:r>
+            <a:r>
+              <a:rPr lang="es-ES" dirty="0"/>
+              <a:t>()</a:t>
+            </a:r>
+          </a:p>
+          <a:p>
+            <a:endParaRPr lang="es-ES" dirty="0"/>
+          </a:p>
+          <a:p>
+            <a:r>
+              <a:rPr lang="es-ES" dirty="0" err="1"/>
+              <a:t>alumno.hablar</a:t>
+            </a:r>
+            <a:r>
+              <a:rPr lang="es-ES" dirty="0"/>
+              <a:t>()</a:t>
+            </a:r>
+          </a:p>
+          <a:p>
+            <a:r>
+              <a:rPr lang="es-ES" dirty="0" err="1"/>
+              <a:t>alumno.estudiar</a:t>
+            </a:r>
+            <a:r>
+              <a:rPr lang="es-ES" dirty="0"/>
+              <a:t>()</a:t>
+            </a:r>
+            <a:endParaRPr lang="es-CL" dirty="0" smtClean="0"/>
+          </a:p>
+          <a:p>
+            <a:endParaRPr lang="es-ES" dirty="0" smtClean="0"/>
+          </a:p>
+          <a:p>
+            <a:r>
+              <a:rPr lang="es-ES" b="1" dirty="0" smtClean="0"/>
+              <a:t>Resultado</a:t>
+            </a:r>
+          </a:p>
+          <a:p>
+            <a:pPr lvl="1"/>
+            <a:r>
+              <a:rPr lang="es-ES" dirty="0" smtClean="0"/>
+              <a:t>Hola</a:t>
+            </a:r>
+            <a:endParaRPr lang="es-ES" dirty="0"/>
+          </a:p>
+          <a:p>
+            <a:pPr lvl="1"/>
+            <a:r>
+              <a:rPr lang="es-ES" dirty="0"/>
+              <a:t>Estoy enseñando Python</a:t>
+            </a:r>
+          </a:p>
+          <a:p>
+            <a:pPr lvl="1"/>
+            <a:r>
+              <a:rPr lang="es-ES" dirty="0"/>
+              <a:t>Hola</a:t>
+            </a:r>
+          </a:p>
+          <a:p>
+            <a:pPr lvl="1"/>
+            <a:r>
+              <a:rPr lang="es-ES" dirty="0"/>
+              <a:t>Estoy estudiando</a:t>
+            </a:r>
+            <a:endParaRPr lang="es-CL" dirty="0" smtClean="0"/>
+          </a:p>
+          <a:p>
+            <a:pPr marL="0" indent="0">
+              <a:buFont typeface="Arial" panose="020B0604020202020204" pitchFamily="34" charset="0"/>
+              <a:buNone/>
+            </a:pPr>
+            <a:endParaRPr lang="es-CL" dirty="0"/>
+          </a:p>
+        </p:txBody>
+      </p:sp>
+    </p:spTree>
+    <p:extLst>
+      <p:ext uri="{BB962C8B-B14F-4D97-AF65-F5344CB8AC3E}">
+        <p14:creationId xmlns:p14="http://schemas.microsoft.com/office/powerpoint/2010/main" val="1928821594"/>
+      </p:ext>
+    </p:extLst>
+  </p:cSld>
+  <p:clrMapOvr>
+    <a:masterClrMapping/>
+  </p:clrMapOvr>
+</p:sld>
+</file>
+
+<file path=ppt/slides/slide44.xml><?xml version="1.0" encoding="utf-8"?>
+<p:sld xmlns:a="http://schemas.openxmlformats.org/drawingml/2006/main" xmlns:r="http://schemas.openxmlformats.org/officeDocument/2006/relationships" xmlns:p="http://schemas.openxmlformats.org/presentationml/2006/main">
+  <p:cSld>
+    <p:spTree>
+      <p:nvGrpSpPr>
+        <p:cNvPr id="1" name=""/>
+        <p:cNvGrpSpPr/>
+        <p:nvPr/>
+      </p:nvGrpSpPr>
+      <p:grpSpPr>
+        <a:xfrm>
+          <a:off x="0" y="0"/>
+          <a:ext cx="0" cy="0"/>
+          <a:chOff x="0" y="0"/>
+          <a:chExt cx="0" cy="0"/>
+        </a:xfrm>
+      </p:grpSpPr>
+      <p:sp>
+        <p:nvSpPr>
+          <p:cNvPr id="2" name="Título 1"/>
+          <p:cNvSpPr>
+            <a:spLocks noGrp="1"/>
+          </p:cNvSpPr>
+          <p:nvPr>
+            <p:ph type="title"/>
+          </p:nvPr>
+        </p:nvSpPr>
+        <p:spPr/>
+        <p:txBody>
+          <a:bodyPr/>
+          <a:lstStyle/>
+          <a:p>
+            <a:r>
+              <a:rPr lang="en-US" dirty="0" err="1"/>
+              <a:t>Resumen</a:t>
+            </a:r>
+            <a:r>
+              <a:rPr lang="en-US" dirty="0"/>
+              <a:t> Conceptual</a:t>
+            </a:r>
+            <a:endParaRPr lang="es-CL" dirty="0"/>
+          </a:p>
+        </p:txBody>
+      </p:sp>
+      <p:graphicFrame>
+        <p:nvGraphicFramePr>
+          <p:cNvPr id="4" name="Marcador de contenido 3"/>
+          <p:cNvGraphicFramePr>
+            <a:graphicFrameLocks noGrp="1"/>
+          </p:cNvGraphicFramePr>
+          <p:nvPr>
+            <p:ph idx="1"/>
+            <p:extLst>
+              <p:ext uri="{D42A27DB-BD31-4B8C-83A1-F6EECF244321}">
+                <p14:modId xmlns:p14="http://schemas.microsoft.com/office/powerpoint/2010/main" val="3816599146"/>
+              </p:ext>
+            </p:extLst>
+          </p:nvPr>
+        </p:nvGraphicFramePr>
+        <p:xfrm>
+          <a:off x="535710" y="1666203"/>
+          <a:ext cx="10936290" cy="4499156"/>
+        </p:xfrm>
+        <a:graphic>
+          <a:graphicData uri="http://schemas.openxmlformats.org/drawingml/2006/table">
+            <a:tbl>
+              <a:tblPr firstRow="1" bandRow="1">
+                <a:tableStyleId>{5DA37D80-6434-44D0-A028-1B22A696006F}</a:tableStyleId>
+              </a:tblPr>
+              <a:tblGrid>
+                <a:gridCol w="1893454">
+                  <a:extLst>
+                    <a:ext uri="{9D8B030D-6E8A-4147-A177-3AD203B41FA5}">
+                      <a16:colId xmlns:a16="http://schemas.microsoft.com/office/drawing/2014/main" val="3580214105"/>
+                    </a:ext>
+                  </a:extLst>
+                </a:gridCol>
+                <a:gridCol w="5458691">
+                  <a:extLst>
+                    <a:ext uri="{9D8B030D-6E8A-4147-A177-3AD203B41FA5}">
+                      <a16:colId xmlns:a16="http://schemas.microsoft.com/office/drawing/2014/main" val="1394782615"/>
+                    </a:ext>
+                  </a:extLst>
+                </a:gridCol>
+                <a:gridCol w="3584145">
+                  <a:extLst>
+                    <a:ext uri="{9D8B030D-6E8A-4147-A177-3AD203B41FA5}">
+                      <a16:colId xmlns:a16="http://schemas.microsoft.com/office/drawing/2014/main" val="2652014333"/>
+                    </a:ext>
+                  </a:extLst>
+                </a:gridCol>
+              </a:tblGrid>
+              <a:tr h="235207">
+                <a:tc>
+                  <a:txBody>
+                    <a:bodyPr/>
+                    <a:lstStyle/>
+                    <a:p>
+                      <a:pPr algn="ctr"/>
+                      <a:r>
+                        <a:rPr lang="en-US" sz="1400" dirty="0" err="1"/>
+                        <a:t>Concepto</a:t>
+                      </a:r>
+                      <a:endParaRPr lang="en-US" sz="1400" dirty="0"/>
+                    </a:p>
+                  </a:txBody>
+                  <a:tcPr marL="58802" marR="58802" marT="29401" marB="29401" anchor="ctr"/>
+                </a:tc>
+                <a:tc>
+                  <a:txBody>
+                    <a:bodyPr/>
+                    <a:lstStyle/>
+                    <a:p>
+                      <a:pPr algn="ctr"/>
+                      <a:r>
+                        <a:rPr lang="en-US" sz="1400"/>
+                        <a:t>Descripción</a:t>
+                      </a:r>
+                    </a:p>
+                  </a:txBody>
+                  <a:tcPr marL="58802" marR="58802" marT="29401" marB="29401" anchor="ctr"/>
+                </a:tc>
+                <a:tc>
+                  <a:txBody>
+                    <a:bodyPr/>
+                    <a:lstStyle/>
+                    <a:p>
+                      <a:pPr algn="ctr"/>
+                      <a:r>
+                        <a:rPr lang="en-US" sz="1400" dirty="0" err="1"/>
+                        <a:t>Ejemplo</a:t>
+                      </a:r>
+                      <a:endParaRPr lang="en-US" sz="1400" dirty="0"/>
+                    </a:p>
+                  </a:txBody>
+                  <a:tcPr marL="58802" marR="58802" marT="29401" marB="29401" anchor="ctr"/>
+                </a:tc>
+                <a:extLst>
+                  <a:ext uri="{0D108BD9-81ED-4DB2-BD59-A6C34878D82A}">
+                    <a16:rowId xmlns:a16="http://schemas.microsoft.com/office/drawing/2014/main" val="1771335230"/>
+                  </a:ext>
+                </a:extLst>
+              </a:tr>
+              <a:tr h="235207">
+                <a:tc>
+                  <a:txBody>
+                    <a:bodyPr/>
+                    <a:lstStyle/>
+                    <a:p>
+                      <a:pPr algn="ctr"/>
+                      <a:r>
+                        <a:rPr lang="en-US" sz="1400" dirty="0" err="1"/>
+                        <a:t>Clase</a:t>
+                      </a:r>
+                      <a:endParaRPr lang="en-US" sz="1400" dirty="0"/>
+                    </a:p>
+                  </a:txBody>
+                  <a:tcPr marL="58802" marR="58802" marT="29401" marB="29401" anchor="ctr"/>
+                </a:tc>
+                <a:tc>
+                  <a:txBody>
+                    <a:bodyPr/>
+                    <a:lstStyle/>
+                    <a:p>
+                      <a:pPr algn="ctr"/>
+                      <a:r>
+                        <a:rPr lang="en-US" sz="1400" dirty="0" err="1"/>
+                        <a:t>Molde</a:t>
+                      </a:r>
+                      <a:r>
+                        <a:rPr lang="en-US" sz="1400" dirty="0"/>
+                        <a:t> para </a:t>
+                      </a:r>
+                      <a:r>
+                        <a:rPr lang="en-US" sz="1400" dirty="0" err="1"/>
+                        <a:t>crear</a:t>
+                      </a:r>
+                      <a:r>
+                        <a:rPr lang="en-US" sz="1400" dirty="0"/>
+                        <a:t> </a:t>
+                      </a:r>
+                      <a:r>
+                        <a:rPr lang="en-US" sz="1400" dirty="0" err="1"/>
+                        <a:t>objetos</a:t>
+                      </a:r>
+                      <a:endParaRPr lang="en-US" sz="1400" dirty="0"/>
+                    </a:p>
+                  </a:txBody>
+                  <a:tcPr marL="58802" marR="58802" marT="29401" marB="29401" anchor="ctr"/>
+                </a:tc>
+                <a:tc>
+                  <a:txBody>
+                    <a:bodyPr/>
+                    <a:lstStyle/>
+                    <a:p>
+                      <a:pPr algn="ctr"/>
+                      <a:r>
+                        <a:rPr lang="en-US" sz="1400"/>
+                        <a:t>class Auto:</a:t>
+                      </a:r>
+                    </a:p>
+                  </a:txBody>
+                  <a:tcPr marL="58802" marR="58802" marT="29401" marB="29401" anchor="ctr"/>
+                </a:tc>
+                <a:extLst>
+                  <a:ext uri="{0D108BD9-81ED-4DB2-BD59-A6C34878D82A}">
+                    <a16:rowId xmlns:a16="http://schemas.microsoft.com/office/drawing/2014/main" val="4252875751"/>
+                  </a:ext>
+                </a:extLst>
+              </a:tr>
+              <a:tr h="235207">
+                <a:tc>
+                  <a:txBody>
+                    <a:bodyPr/>
+                    <a:lstStyle/>
+                    <a:p>
+                      <a:pPr algn="ctr"/>
+                      <a:r>
+                        <a:rPr lang="en-US" sz="1400" dirty="0" err="1"/>
+                        <a:t>Objeto</a:t>
+                      </a:r>
+                      <a:endParaRPr lang="en-US" sz="1400" dirty="0"/>
+                    </a:p>
+                  </a:txBody>
+                  <a:tcPr marL="58802" marR="58802" marT="29401" marB="29401" anchor="ctr"/>
+                </a:tc>
+                <a:tc>
+                  <a:txBody>
+                    <a:bodyPr/>
+                    <a:lstStyle/>
+                    <a:p>
+                      <a:pPr algn="ctr"/>
+                      <a:r>
+                        <a:rPr lang="en-US" sz="1400" dirty="0" err="1"/>
+                        <a:t>Instancia</a:t>
+                      </a:r>
+                      <a:r>
+                        <a:rPr lang="en-US" sz="1400" dirty="0"/>
+                        <a:t> de </a:t>
+                      </a:r>
+                      <a:r>
+                        <a:rPr lang="en-US" sz="1400" dirty="0" err="1"/>
+                        <a:t>una</a:t>
+                      </a:r>
+                      <a:r>
+                        <a:rPr lang="en-US" sz="1400" dirty="0"/>
+                        <a:t> </a:t>
+                      </a:r>
+                      <a:r>
+                        <a:rPr lang="en-US" sz="1400" dirty="0" err="1"/>
+                        <a:t>clase</a:t>
+                      </a:r>
+                      <a:endParaRPr lang="en-US" sz="1400" dirty="0"/>
+                    </a:p>
+                  </a:txBody>
+                  <a:tcPr marL="58802" marR="58802" marT="29401" marB="29401" anchor="ctr"/>
+                </a:tc>
+                <a:tc>
+                  <a:txBody>
+                    <a:bodyPr/>
+                    <a:lstStyle/>
+                    <a:p>
+                      <a:pPr algn="ctr"/>
+                      <a:r>
+                        <a:rPr lang="en-US" sz="1400"/>
+                        <a:t>auto = Auto()</a:t>
+                      </a:r>
+                    </a:p>
+                  </a:txBody>
+                  <a:tcPr marL="58802" marR="58802" marT="29401" marB="29401" anchor="ctr"/>
+                </a:tc>
+                <a:extLst>
+                  <a:ext uri="{0D108BD9-81ED-4DB2-BD59-A6C34878D82A}">
+                    <a16:rowId xmlns:a16="http://schemas.microsoft.com/office/drawing/2014/main" val="1596476999"/>
+                  </a:ext>
+                </a:extLst>
+              </a:tr>
+              <a:tr h="411613">
+                <a:tc>
+                  <a:txBody>
+                    <a:bodyPr/>
+                    <a:lstStyle/>
+                    <a:p>
+                      <a:pPr algn="ctr"/>
+                      <a:r>
+                        <a:rPr lang="en-US" sz="1400" dirty="0" err="1"/>
+                        <a:t>Atributo</a:t>
+                      </a:r>
+                      <a:endParaRPr lang="en-US" sz="1400" dirty="0"/>
+                    </a:p>
+                  </a:txBody>
+                  <a:tcPr marL="58802" marR="58802" marT="29401" marB="29401" anchor="ctr"/>
+                </a:tc>
+                <a:tc>
+                  <a:txBody>
+                    <a:bodyPr/>
+                    <a:lstStyle/>
+                    <a:p>
+                      <a:pPr algn="ctr"/>
+                      <a:r>
+                        <a:rPr lang="en-US" sz="1400" dirty="0" err="1"/>
+                        <a:t>Característica</a:t>
+                      </a:r>
+                      <a:r>
+                        <a:rPr lang="en-US" sz="1400" dirty="0"/>
+                        <a:t> del </a:t>
+                      </a:r>
+                      <a:r>
+                        <a:rPr lang="en-US" sz="1400" dirty="0" err="1"/>
+                        <a:t>objeto</a:t>
+                      </a:r>
+                      <a:endParaRPr lang="en-US" sz="1400" dirty="0"/>
+                    </a:p>
+                  </a:txBody>
+                  <a:tcPr marL="58802" marR="58802" marT="29401" marB="29401" anchor="ctr"/>
+                </a:tc>
+                <a:tc>
+                  <a:txBody>
+                    <a:bodyPr/>
+                    <a:lstStyle/>
+                    <a:p>
+                      <a:pPr algn="ctr"/>
+                      <a:r>
+                        <a:rPr lang="en-US" sz="1400" dirty="0"/>
+                        <a:t>color, </a:t>
+                      </a:r>
+                      <a:r>
+                        <a:rPr lang="en-US" sz="1400" dirty="0" err="1"/>
+                        <a:t>marca</a:t>
+                      </a:r>
+                      <a:endParaRPr lang="en-US" sz="1400" dirty="0"/>
+                    </a:p>
+                  </a:txBody>
+                  <a:tcPr marL="58802" marR="58802" marT="29401" marB="29401" anchor="ctr"/>
+                </a:tc>
+                <a:extLst>
+                  <a:ext uri="{0D108BD9-81ED-4DB2-BD59-A6C34878D82A}">
+                    <a16:rowId xmlns:a16="http://schemas.microsoft.com/office/drawing/2014/main" val="3717856385"/>
+                  </a:ext>
+                </a:extLst>
+              </a:tr>
+              <a:tr h="235207">
+                <a:tc>
+                  <a:txBody>
+                    <a:bodyPr/>
+                    <a:lstStyle/>
+                    <a:p>
+                      <a:pPr algn="ctr"/>
+                      <a:r>
+                        <a:rPr lang="en-US" sz="1400" dirty="0" err="1"/>
+                        <a:t>Método</a:t>
+                      </a:r>
+                      <a:endParaRPr lang="en-US" sz="1400" dirty="0"/>
+                    </a:p>
+                  </a:txBody>
+                  <a:tcPr marL="58802" marR="58802" marT="29401" marB="29401" anchor="ctr"/>
+                </a:tc>
+                <a:tc>
+                  <a:txBody>
+                    <a:bodyPr/>
+                    <a:lstStyle/>
+                    <a:p>
+                      <a:pPr algn="ctr"/>
+                      <a:r>
+                        <a:rPr lang="en-US" sz="1400" dirty="0" err="1"/>
+                        <a:t>Acción</a:t>
+                      </a:r>
+                      <a:r>
+                        <a:rPr lang="en-US" sz="1400" dirty="0"/>
+                        <a:t> del </a:t>
+                      </a:r>
+                      <a:r>
+                        <a:rPr lang="en-US" sz="1400" dirty="0" err="1"/>
+                        <a:t>objeto</a:t>
+                      </a:r>
+                      <a:endParaRPr lang="en-US" sz="1400" dirty="0"/>
+                    </a:p>
+                  </a:txBody>
+                  <a:tcPr marL="58802" marR="58802" marT="29401" marB="29401" anchor="ctr"/>
+                </a:tc>
+                <a:tc>
+                  <a:txBody>
+                    <a:bodyPr/>
+                    <a:lstStyle/>
+                    <a:p>
+                      <a:pPr algn="ctr"/>
+                      <a:r>
+                        <a:rPr lang="en-US" sz="1400"/>
+                        <a:t>acelerar()</a:t>
+                      </a:r>
+                    </a:p>
+                  </a:txBody>
+                  <a:tcPr marL="58802" marR="58802" marT="29401" marB="29401" anchor="ctr"/>
+                </a:tc>
+                <a:extLst>
+                  <a:ext uri="{0D108BD9-81ED-4DB2-BD59-A6C34878D82A}">
+                    <a16:rowId xmlns:a16="http://schemas.microsoft.com/office/drawing/2014/main" val="4099604949"/>
+                  </a:ext>
+                </a:extLst>
+              </a:tr>
+              <a:tr h="411613">
+                <a:tc>
+                  <a:txBody>
+                    <a:bodyPr/>
+                    <a:lstStyle/>
+                    <a:p>
+                      <a:pPr algn="ctr"/>
+                      <a:r>
+                        <a:rPr lang="en-US" sz="1400"/>
+                        <a:t>Estado</a:t>
+                      </a:r>
+                    </a:p>
+                  </a:txBody>
+                  <a:tcPr marL="58802" marR="58802" marT="29401" marB="29401" anchor="ctr"/>
+                </a:tc>
+                <a:tc>
+                  <a:txBody>
+                    <a:bodyPr/>
+                    <a:lstStyle/>
+                    <a:p>
+                      <a:pPr algn="ctr"/>
+                      <a:r>
+                        <a:rPr lang="es-ES" sz="1400" dirty="0"/>
+                        <a:t>Valores actuales de los atributos</a:t>
+                      </a:r>
+                    </a:p>
+                  </a:txBody>
+                  <a:tcPr marL="58802" marR="58802" marT="29401" marB="29401" anchor="ctr"/>
+                </a:tc>
+                <a:tc>
+                  <a:txBody>
+                    <a:bodyPr/>
+                    <a:lstStyle/>
+                    <a:p>
+                      <a:pPr algn="ctr"/>
+                      <a:r>
+                        <a:rPr lang="en-US" sz="1400" dirty="0" err="1"/>
+                        <a:t>Velocidad</a:t>
+                      </a:r>
+                      <a:r>
+                        <a:rPr lang="en-US" sz="1400" dirty="0"/>
+                        <a:t> = 80 km/h</a:t>
+                      </a:r>
+                    </a:p>
+                  </a:txBody>
+                  <a:tcPr marL="58802" marR="58802" marT="29401" marB="29401" anchor="ctr"/>
+                </a:tc>
+                <a:extLst>
+                  <a:ext uri="{0D108BD9-81ED-4DB2-BD59-A6C34878D82A}">
+                    <a16:rowId xmlns:a16="http://schemas.microsoft.com/office/drawing/2014/main" val="3264857088"/>
+                  </a:ext>
+                </a:extLst>
+              </a:tr>
+              <a:tr h="411613">
+                <a:tc>
+                  <a:txBody>
+                    <a:bodyPr/>
+                    <a:lstStyle/>
+                    <a:p>
+                      <a:pPr algn="ctr"/>
+                      <a:r>
+                        <a:rPr lang="en-US" sz="1400"/>
+                        <a:t>Abstracción</a:t>
+                      </a:r>
+                    </a:p>
+                  </a:txBody>
+                  <a:tcPr marL="58802" marR="58802" marT="29401" marB="29401" anchor="ctr"/>
+                </a:tc>
+                <a:tc>
+                  <a:txBody>
+                    <a:bodyPr/>
+                    <a:lstStyle/>
+                    <a:p>
+                      <a:pPr algn="ctr"/>
+                      <a:r>
+                        <a:rPr lang="es-ES" sz="1400" dirty="0"/>
+                        <a:t>Mostrar lo esencial y ocultar detalles</a:t>
+                      </a:r>
+                    </a:p>
+                  </a:txBody>
+                  <a:tcPr marL="58802" marR="58802" marT="29401" marB="29401" anchor="ctr"/>
+                </a:tc>
+                <a:tc>
+                  <a:txBody>
+                    <a:bodyPr/>
+                    <a:lstStyle/>
+                    <a:p>
+                      <a:pPr algn="ctr"/>
+                      <a:r>
+                        <a:rPr lang="en-US" sz="1400" dirty="0" err="1"/>
+                        <a:t>preparar_cafe</a:t>
+                      </a:r>
+                      <a:r>
+                        <a:rPr lang="en-US" sz="1400" dirty="0"/>
+                        <a:t>()</a:t>
+                      </a:r>
+                    </a:p>
+                  </a:txBody>
+                  <a:tcPr marL="58802" marR="58802" marT="29401" marB="29401" anchor="ctr"/>
+                </a:tc>
+                <a:extLst>
+                  <a:ext uri="{0D108BD9-81ED-4DB2-BD59-A6C34878D82A}">
+                    <a16:rowId xmlns:a16="http://schemas.microsoft.com/office/drawing/2014/main" val="1458112718"/>
+                  </a:ext>
+                </a:extLst>
+              </a:tr>
+              <a:tr h="411613">
+                <a:tc>
+                  <a:txBody>
+                    <a:bodyPr/>
+                    <a:lstStyle/>
+                    <a:p>
+                      <a:pPr algn="ctr"/>
+                      <a:r>
+                        <a:rPr lang="en-US" sz="1400"/>
+                        <a:t>Encapsulamiento</a:t>
+                      </a:r>
+                    </a:p>
+                  </a:txBody>
+                  <a:tcPr marL="58802" marR="58802" marT="29401" marB="29401" anchor="ctr"/>
+                </a:tc>
+                <a:tc>
+                  <a:txBody>
+                    <a:bodyPr/>
+                    <a:lstStyle/>
+                    <a:p>
+                      <a:pPr algn="ctr"/>
+                      <a:r>
+                        <a:rPr lang="en-US" sz="1400" dirty="0" err="1"/>
+                        <a:t>Proteger</a:t>
+                      </a:r>
+                      <a:r>
+                        <a:rPr lang="en-US" sz="1400" dirty="0"/>
+                        <a:t> </a:t>
+                      </a:r>
+                      <a:r>
+                        <a:rPr lang="en-US" sz="1400" dirty="0" err="1"/>
+                        <a:t>los</a:t>
+                      </a:r>
+                      <a:r>
+                        <a:rPr lang="en-US" sz="1400" dirty="0"/>
+                        <a:t> </a:t>
+                      </a:r>
+                      <a:r>
+                        <a:rPr lang="en-US" sz="1400" dirty="0" err="1"/>
+                        <a:t>datos</a:t>
+                      </a:r>
+                      <a:r>
+                        <a:rPr lang="en-US" sz="1400" dirty="0"/>
+                        <a:t> </a:t>
+                      </a:r>
+                      <a:r>
+                        <a:rPr lang="en-US" sz="1400" dirty="0" err="1"/>
+                        <a:t>internos</a:t>
+                      </a:r>
+                      <a:endParaRPr lang="en-US" sz="1400" dirty="0"/>
+                    </a:p>
+                  </a:txBody>
+                  <a:tcPr marL="58802" marR="58802" marT="29401" marB="29401" anchor="ctr"/>
+                </a:tc>
+                <a:tc>
+                  <a:txBody>
+                    <a:bodyPr/>
+                    <a:lstStyle/>
+                    <a:p>
+                      <a:pPr algn="ctr"/>
+                      <a:r>
+                        <a:rPr lang="en-US" sz="1400" dirty="0"/>
+                        <a:t>__</a:t>
+                      </a:r>
+                      <a:r>
+                        <a:rPr lang="en-US" sz="1400" dirty="0" err="1"/>
+                        <a:t>saldo</a:t>
+                      </a:r>
+                      <a:endParaRPr lang="en-US" sz="1400" dirty="0"/>
+                    </a:p>
+                  </a:txBody>
+                  <a:tcPr marL="58802" marR="58802" marT="29401" marB="29401" anchor="ctr"/>
+                </a:tc>
+                <a:extLst>
+                  <a:ext uri="{0D108BD9-81ED-4DB2-BD59-A6C34878D82A}">
+                    <a16:rowId xmlns:a16="http://schemas.microsoft.com/office/drawing/2014/main" val="3642036498"/>
+                  </a:ext>
+                </a:extLst>
+              </a:tr>
+              <a:tr h="411613">
+                <a:tc>
+                  <a:txBody>
+                    <a:bodyPr/>
+                    <a:lstStyle/>
+                    <a:p>
+                      <a:pPr algn="ctr"/>
+                      <a:r>
+                        <a:rPr lang="en-US" sz="1400"/>
+                        <a:t>Herencia</a:t>
+                      </a:r>
+                    </a:p>
+                  </a:txBody>
+                  <a:tcPr marL="58802" marR="58802" marT="29401" marB="29401" anchor="ctr"/>
+                </a:tc>
+                <a:tc>
+                  <a:txBody>
+                    <a:bodyPr/>
+                    <a:lstStyle/>
+                    <a:p>
+                      <a:pPr algn="ctr"/>
+                      <a:r>
+                        <a:rPr lang="en-US" sz="1400"/>
+                        <a:t>Reutilizar código entre clases</a:t>
+                      </a:r>
+                    </a:p>
+                  </a:txBody>
+                  <a:tcPr marL="58802" marR="58802" marT="29401" marB="29401" anchor="ctr"/>
+                </a:tc>
+                <a:tc>
+                  <a:txBody>
+                    <a:bodyPr/>
+                    <a:lstStyle/>
+                    <a:p>
+                      <a:pPr algn="ctr"/>
+                      <a:r>
+                        <a:rPr lang="en-US" sz="1400" dirty="0" err="1"/>
+                        <a:t>Perro</a:t>
+                      </a:r>
+                      <a:r>
+                        <a:rPr lang="en-US" sz="1400" dirty="0"/>
+                        <a:t>(Animal)</a:t>
+                      </a:r>
+                    </a:p>
+                  </a:txBody>
+                  <a:tcPr marL="58802" marR="58802" marT="29401" marB="29401" anchor="ctr"/>
+                </a:tc>
+                <a:extLst>
+                  <a:ext uri="{0D108BD9-81ED-4DB2-BD59-A6C34878D82A}">
+                    <a16:rowId xmlns:a16="http://schemas.microsoft.com/office/drawing/2014/main" val="2709125972"/>
+                  </a:ext>
+                </a:extLst>
+              </a:tr>
+              <a:tr h="588019">
+                <a:tc>
+                  <a:txBody>
+                    <a:bodyPr/>
+                    <a:lstStyle/>
+                    <a:p>
+                      <a:pPr algn="ctr"/>
+                      <a:r>
+                        <a:rPr lang="en-US" sz="1400"/>
+                        <a:t>Polimorfismo</a:t>
+                      </a:r>
+                    </a:p>
+                  </a:txBody>
+                  <a:tcPr marL="58802" marR="58802" marT="29401" marB="29401" anchor="ctr"/>
+                </a:tc>
+                <a:tc>
+                  <a:txBody>
+                    <a:bodyPr/>
+                    <a:lstStyle/>
+                    <a:p>
+                      <a:pPr algn="ctr"/>
+                      <a:r>
+                        <a:rPr lang="es-ES" sz="1400"/>
+                        <a:t>Un mismo método con distintos comportamientos</a:t>
+                      </a:r>
+                    </a:p>
+                  </a:txBody>
+                  <a:tcPr marL="58802" marR="58802" marT="29401" marB="29401" anchor="ctr"/>
+                </a:tc>
+                <a:tc>
+                  <a:txBody>
+                    <a:bodyPr/>
+                    <a:lstStyle/>
+                    <a:p>
+                      <a:pPr algn="ctr"/>
+                      <a:r>
+                        <a:rPr lang="es-ES" sz="1400" dirty="0"/>
+                        <a:t>hablar() en Perro y Gato</a:t>
+                      </a:r>
+                    </a:p>
+                  </a:txBody>
+                  <a:tcPr marL="58802" marR="58802" marT="29401" marB="29401" anchor="ctr"/>
+                </a:tc>
+                <a:extLst>
+                  <a:ext uri="{0D108BD9-81ED-4DB2-BD59-A6C34878D82A}">
+                    <a16:rowId xmlns:a16="http://schemas.microsoft.com/office/drawing/2014/main" val="3057161171"/>
+                  </a:ext>
+                </a:extLst>
+              </a:tr>
+              <a:tr h="764424">
+                <a:tc>
+                  <a:txBody>
+                    <a:bodyPr/>
+                    <a:lstStyle/>
+                    <a:p>
+                      <a:pPr algn="ctr"/>
+                      <a:r>
+                        <a:rPr lang="en-US" sz="1400" dirty="0" err="1"/>
+                        <a:t>Sobrecarga</a:t>
+                      </a:r>
+                      <a:endParaRPr lang="en-US" sz="1400" dirty="0"/>
+                    </a:p>
+                  </a:txBody>
+                  <a:tcPr marL="58802" marR="58802" marT="29401" marB="29401" anchor="ctr"/>
+                </a:tc>
+                <a:tc>
+                  <a:txBody>
+                    <a:bodyPr/>
+                    <a:lstStyle/>
+                    <a:p>
+                      <a:pPr algn="ctr"/>
+                      <a:r>
+                        <a:rPr lang="es-ES" sz="1400"/>
+                        <a:t>En Python se logra mediante parámetros opcionales, *args y métodos especiales</a:t>
+                      </a:r>
+                    </a:p>
+                  </a:txBody>
+                  <a:tcPr marL="58802" marR="58802" marT="29401" marB="29401" anchor="ctr"/>
+                </a:tc>
+                <a:tc>
+                  <a:txBody>
+                    <a:bodyPr/>
+                    <a:lstStyle/>
+                    <a:p>
+                      <a:pPr algn="ctr"/>
+                      <a:r>
+                        <a:rPr lang="en-US" sz="1400" dirty="0" err="1"/>
+                        <a:t>sumar</a:t>
+                      </a:r>
+                      <a:r>
+                        <a:rPr lang="en-US" sz="1400" dirty="0"/>
+                        <a:t>(a, b=0)</a:t>
+                      </a:r>
+                    </a:p>
+                  </a:txBody>
+                  <a:tcPr marL="58802" marR="58802" marT="29401" marB="29401" anchor="ctr"/>
+                </a:tc>
+                <a:extLst>
+                  <a:ext uri="{0D108BD9-81ED-4DB2-BD59-A6C34878D82A}">
+                    <a16:rowId xmlns:a16="http://schemas.microsoft.com/office/drawing/2014/main" val="845587132"/>
+                  </a:ext>
+                </a:extLst>
+              </a:tr>
+            </a:tbl>
+          </a:graphicData>
+        </a:graphic>
+      </p:graphicFrame>
+    </p:spTree>
+    <p:extLst>
+      <p:ext uri="{BB962C8B-B14F-4D97-AF65-F5344CB8AC3E}">
+        <p14:creationId xmlns:p14="http://schemas.microsoft.com/office/powerpoint/2010/main" val="1039738768"/>
+      </p:ext>
+    </p:extLst>
+  </p:cSld>
+  <p:clrMapOvr>
+    <a:masterClrMapping/>
+  </p:clrMapOvr>
+</p:sld>
+</file>
+
+<file path=ppt/slides/slide45.xml><?xml version="1.0" encoding="utf-8"?>
+<p:sld xmlns:a="http://schemas.openxmlformats.org/drawingml/2006/main" xmlns:r="http://schemas.openxmlformats.org/officeDocument/2006/relationships" xmlns:p="http://schemas.openxmlformats.org/presentationml/2006/main">
+  <p:cSld>
+    <p:spTree>
+      <p:nvGrpSpPr>
+        <p:cNvPr id="1" name=""/>
+        <p:cNvGrpSpPr/>
+        <p:nvPr/>
+      </p:nvGrpSpPr>
+      <p:grpSpPr>
+        <a:xfrm>
+          <a:off x="0" y="0"/>
+          <a:ext cx="0" cy="0"/>
+          <a:chOff x="0" y="0"/>
+          <a:chExt cx="0" cy="0"/>
+        </a:xfrm>
+      </p:grpSpPr>
+      <p:sp>
+        <p:nvSpPr>
+          <p:cNvPr id="2" name="Título 1"/>
+          <p:cNvSpPr>
+            <a:spLocks noGrp="1"/>
+          </p:cNvSpPr>
+          <p:nvPr>
+            <p:ph type="title"/>
+          </p:nvPr>
+        </p:nvSpPr>
+        <p:spPr/>
+        <p:txBody>
+          <a:bodyPr/>
+          <a:lstStyle/>
+          <a:p>
+            <a:r>
+              <a:rPr lang="en-US" dirty="0" err="1"/>
+              <a:t>Actividades</a:t>
+            </a:r>
+            <a:r>
+              <a:rPr lang="en-US" dirty="0"/>
+              <a:t> </a:t>
+            </a:r>
+            <a:r>
+              <a:rPr lang="en-US" dirty="0" err="1"/>
+              <a:t>Prácticas</a:t>
+            </a:r>
+            <a:endParaRPr lang="es-CL" dirty="0"/>
+          </a:p>
+        </p:txBody>
+      </p:sp>
+      <p:sp>
+        <p:nvSpPr>
+          <p:cNvPr id="3" name="Marcador de contenido 2"/>
+          <p:cNvSpPr>
+            <a:spLocks noGrp="1"/>
+          </p:cNvSpPr>
+          <p:nvPr>
+            <p:ph idx="1"/>
+          </p:nvPr>
+        </p:nvSpPr>
+        <p:spPr/>
+        <p:txBody>
+          <a:bodyPr>
+            <a:normAutofit fontScale="92500" lnSpcReduction="20000"/>
+          </a:bodyPr>
+          <a:lstStyle/>
+          <a:p>
+            <a:r>
+              <a:rPr lang="es-ES" dirty="0"/>
+              <a:t>Crear una clase Libro con los atributos título, autor y precio, y un método </a:t>
+            </a:r>
+            <a:r>
+              <a:rPr lang="es-ES" dirty="0" err="1"/>
+              <a:t>mostrar_información</a:t>
+            </a:r>
+            <a:r>
+              <a:rPr lang="es-ES" dirty="0" smtClean="0"/>
+              <a:t>().</a:t>
+            </a:r>
+          </a:p>
+          <a:p>
+            <a:r>
+              <a:rPr lang="es-ES" dirty="0" smtClean="0"/>
+              <a:t>Crear </a:t>
+            </a:r>
+            <a:r>
+              <a:rPr lang="es-ES" dirty="0"/>
+              <a:t>una clase Empleado con un atributo privado __salario y métodos para consultar y actualizar el salario validando que no sea negativo</a:t>
+            </a:r>
+            <a:r>
+              <a:rPr lang="es-ES" dirty="0" smtClean="0"/>
+              <a:t>.</a:t>
+            </a:r>
+          </a:p>
+          <a:p>
+            <a:r>
+              <a:rPr lang="es-ES" dirty="0" smtClean="0"/>
+              <a:t>Diseñar </a:t>
+            </a:r>
+            <a:r>
+              <a:rPr lang="es-ES" dirty="0"/>
+              <a:t>una jerarquía de clases con Vehículo como clase base y Automóvil y Motocicleta como clases derivadas</a:t>
+            </a:r>
+            <a:r>
+              <a:rPr lang="es-ES" dirty="0" smtClean="0"/>
+              <a:t>.</a:t>
+            </a:r>
+          </a:p>
+          <a:p>
+            <a:r>
+              <a:rPr lang="es-ES" dirty="0" smtClean="0"/>
+              <a:t>Implementar </a:t>
+            </a:r>
+            <a:r>
+              <a:rPr lang="es-ES" dirty="0"/>
+              <a:t>las clases Rectángulo y Círculo, ambas con un método </a:t>
+            </a:r>
+            <a:r>
+              <a:rPr lang="es-ES" dirty="0" err="1"/>
+              <a:t>calcular_area</a:t>
+            </a:r>
+            <a:r>
+              <a:rPr lang="es-ES" dirty="0"/>
+              <a:t>(), y recorrer una lista de figuras llamando al mismo método para observar el polimorfismo</a:t>
+            </a:r>
+            <a:r>
+              <a:rPr lang="es-ES" dirty="0" smtClean="0"/>
+              <a:t>.</a:t>
+            </a:r>
+          </a:p>
+          <a:p>
+            <a:r>
+              <a:rPr lang="es-ES" dirty="0" smtClean="0"/>
+              <a:t>Crear </a:t>
+            </a:r>
+            <a:r>
+              <a:rPr lang="es-ES" dirty="0"/>
+              <a:t>una clase Calculadora que permita sumar una cantidad variable de números utilizando *</a:t>
+            </a:r>
+            <a:r>
+              <a:rPr lang="es-ES" dirty="0" err="1"/>
+              <a:t>args</a:t>
+            </a:r>
+            <a:r>
+              <a:rPr lang="es-ES" dirty="0"/>
+              <a:t>.</a:t>
+            </a:r>
+            <a:endParaRPr lang="es-CL" dirty="0"/>
+          </a:p>
+        </p:txBody>
+      </p:sp>
+    </p:spTree>
+    <p:extLst>
+      <p:ext uri="{BB962C8B-B14F-4D97-AF65-F5344CB8AC3E}">
+        <p14:creationId xmlns:p14="http://schemas.microsoft.com/office/powerpoint/2010/main" val="2530534259"/>
+      </p:ext>
+    </p:extLst>
+  </p:cSld>
+  <p:clrMapOvr>
+    <a:masterClrMapping/>
+  </p:clrMapOvr>
+</p:sld>
+</file>
+
+<file path=ppt/slides/slide46.xml><?xml version="1.0" encoding="utf-8"?>
+<p:sld xmlns:a="http://schemas.openxmlformats.org/drawingml/2006/main" xmlns:r="http://schemas.openxmlformats.org/officeDocument/2006/relationships" xmlns:p="http://schemas.openxmlformats.org/presentationml/2006/main">
+  <p:cSld>
+    <p:spTree>
+      <p:nvGrpSpPr>
+        <p:cNvPr id="1" name=""/>
+        <p:cNvGrpSpPr/>
+        <p:nvPr/>
+      </p:nvGrpSpPr>
+      <p:grpSpPr>
+        <a:xfrm>
+          <a:off x="0" y="0"/>
+          <a:ext cx="0" cy="0"/>
+          <a:chOff x="0" y="0"/>
+          <a:chExt cx="0" cy="0"/>
+        </a:xfrm>
+      </p:grpSpPr>
+      <p:sp>
+        <p:nvSpPr>
+          <p:cNvPr id="2" name="Título 1"/>
+          <p:cNvSpPr>
+            <a:spLocks noGrp="1"/>
+          </p:cNvSpPr>
+          <p:nvPr>
+            <p:ph type="title"/>
+          </p:nvPr>
+        </p:nvSpPr>
+        <p:spPr/>
+        <p:txBody>
+          <a:bodyPr/>
+          <a:lstStyle/>
+          <a:p>
+            <a:r>
+              <a:rPr lang="en-US" dirty="0" err="1"/>
+              <a:t>Conclusión</a:t>
+            </a:r>
+            <a:endParaRPr lang="es-CL" dirty="0"/>
+          </a:p>
+        </p:txBody>
+      </p:sp>
+      <p:sp>
+        <p:nvSpPr>
+          <p:cNvPr id="3" name="Marcador de contenido 2"/>
+          <p:cNvSpPr>
+            <a:spLocks noGrp="1"/>
+          </p:cNvSpPr>
+          <p:nvPr>
+            <p:ph idx="1"/>
+          </p:nvPr>
+        </p:nvSpPr>
+        <p:spPr/>
+        <p:txBody>
+          <a:bodyPr>
+            <a:normAutofit lnSpcReduction="10000"/>
+          </a:bodyPr>
+          <a:lstStyle/>
+          <a:p>
+            <a:r>
+              <a:rPr lang="es-ES" dirty="0"/>
+              <a:t>La Programación Orientada a Objetos organiza el software alrededor de </a:t>
+            </a:r>
+            <a:r>
+              <a:rPr lang="es-ES" b="1" dirty="0"/>
+              <a:t>objetos</a:t>
+            </a:r>
+            <a:r>
+              <a:rPr lang="es-ES" dirty="0"/>
+              <a:t> que combinan datos y comportamientos. Este paradigma mejora la reutilización del código, facilita el mantenimiento y permite modelar problemas del mundo real de forma natural. Los pilares de la POO —</a:t>
+            </a:r>
+            <a:r>
+              <a:rPr lang="es-ES" b="1" dirty="0"/>
+              <a:t>abstracción, encapsulamiento, herencia y polimorfismo</a:t>
+            </a:r>
+            <a:r>
+              <a:rPr lang="es-ES" dirty="0"/>
+              <a:t>—, junto con las técnicas que Python ofrece para simular la sobrecarga, constituyen la base para desarrollar aplicaciones escalables y robustas. Dominar estos conceptos permitirá afrontar con éxito las siguientes unidades del curso, donde se construirán sistemas más complejos aplicando estos principios.</a:t>
+            </a:r>
+            <a:endParaRPr lang="es-CL" dirty="0"/>
+          </a:p>
+        </p:txBody>
+      </p:sp>
+    </p:spTree>
+    <p:extLst>
+      <p:ext uri="{BB962C8B-B14F-4D97-AF65-F5344CB8AC3E}">
+        <p14:creationId xmlns:p14="http://schemas.microsoft.com/office/powerpoint/2010/main" val="93062243"/>
+      </p:ext>
+    </p:extLst>
+  </p:cSld>
+  <p:clrMapOvr>
+    <a:masterClrMapping/>
+  </p:clrMapOvr>
+</p:sld>
+</file>
+
+<file path=ppt/slides/slide47.xml><?xml version="1.0" encoding="utf-8"?>
+<p:sld xmlns:a="http://schemas.openxmlformats.org/drawingml/2006/main" xmlns:r="http://schemas.openxmlformats.org/officeDocument/2006/relationships" xmlns:p="http://schemas.openxmlformats.org/presentationml/2006/main">
+  <p:cSld>
+    <p:spTree>
+      <p:nvGrpSpPr>
+        <p:cNvPr id="1" name=""/>
+        <p:cNvGrpSpPr/>
+        <p:nvPr/>
+      </p:nvGrpSpPr>
+      <p:grpSpPr>
+        <a:xfrm>
+          <a:off x="0" y="0"/>
+          <a:ext cx="0" cy="0"/>
+          <a:chOff x="0" y="0"/>
+          <a:chExt cx="0" cy="0"/>
+        </a:xfrm>
+      </p:grpSpPr>
+      <p:sp>
+        <p:nvSpPr>
+          <p:cNvPr id="2" name="Título 1"/>
+          <p:cNvSpPr>
+            <a:spLocks noGrp="1"/>
+          </p:cNvSpPr>
+          <p:nvPr>
+            <p:ph type="title"/>
+          </p:nvPr>
+        </p:nvSpPr>
+        <p:spPr/>
+        <p:txBody>
+          <a:bodyPr/>
+          <a:lstStyle/>
+          <a:p>
+            <a:endParaRPr lang="es-CL"/>
+          </a:p>
+        </p:txBody>
+      </p:sp>
+      <p:sp>
+        <p:nvSpPr>
+          <p:cNvPr id="3" name="Marcador de contenido 2"/>
+          <p:cNvSpPr>
+            <a:spLocks noGrp="1"/>
+          </p:cNvSpPr>
+          <p:nvPr>
+            <p:ph idx="1"/>
+          </p:nvPr>
+        </p:nvSpPr>
+        <p:spPr/>
+        <p:txBody>
+          <a:bodyPr/>
+          <a:lstStyle/>
+          <a:p>
+            <a:endParaRPr lang="es-CL"/>
+          </a:p>
+        </p:txBody>
+      </p:sp>
+    </p:spTree>
+    <p:extLst>
+      <p:ext uri="{BB962C8B-B14F-4D97-AF65-F5344CB8AC3E}">
+        <p14:creationId xmlns:p14="http://schemas.microsoft.com/office/powerpoint/2010/main" val="3801171791"/>
+      </p:ext>
+    </p:extLst>
+  </p:cSld>
+  <p:clrMapOvr>
+    <a:masterClrMapping/>
+  </p:clrMapOvr>
+</p:sld>
+</file>
+
+<file path=ppt/slides/slide48.xml><?xml version="1.0" encoding="utf-8"?>
+<p:sld xmlns:a="http://schemas.openxmlformats.org/drawingml/2006/main" xmlns:r="http://schemas.openxmlformats.org/officeDocument/2006/relationships" xmlns:p="http://schemas.openxmlformats.org/presentationml/2006/main">
+  <p:cSld>
+    <p:spTree>
+      <p:nvGrpSpPr>
+        <p:cNvPr id="1" name=""/>
+        <p:cNvGrpSpPr/>
+        <p:nvPr/>
+      </p:nvGrpSpPr>
+      <p:grpSpPr>
+        <a:xfrm>
+          <a:off x="0" y="0"/>
+          <a:ext cx="0" cy="0"/>
+          <a:chOff x="0" y="0"/>
+          <a:chExt cx="0" cy="0"/>
+        </a:xfrm>
+      </p:grpSpPr>
+      <p:sp>
+        <p:nvSpPr>
+          <p:cNvPr id="2" name="Título 1"/>
+          <p:cNvSpPr>
+            <a:spLocks noGrp="1"/>
+          </p:cNvSpPr>
+          <p:nvPr>
+            <p:ph type="title"/>
+          </p:nvPr>
+        </p:nvSpPr>
+        <p:spPr/>
+        <p:txBody>
+          <a:bodyPr/>
+          <a:lstStyle/>
+          <a:p>
+            <a:endParaRPr lang="es-CL"/>
+          </a:p>
+        </p:txBody>
+      </p:sp>
+      <p:sp>
+        <p:nvSpPr>
+          <p:cNvPr id="3" name="Marcador de contenido 2"/>
+          <p:cNvSpPr>
+            <a:spLocks noGrp="1"/>
+          </p:cNvSpPr>
+          <p:nvPr>
+            <p:ph idx="1"/>
+          </p:nvPr>
+        </p:nvSpPr>
+        <p:spPr/>
+        <p:txBody>
+          <a:bodyPr/>
+          <a:lstStyle/>
+          <a:p>
+            <a:endParaRPr lang="es-CL"/>
+          </a:p>
+        </p:txBody>
+      </p:sp>
+    </p:spTree>
+    <p:extLst>
+      <p:ext uri="{BB962C8B-B14F-4D97-AF65-F5344CB8AC3E}">
+        <p14:creationId xmlns:p14="http://schemas.microsoft.com/office/powerpoint/2010/main" val="3051252287"/>
+      </p:ext>
+    </p:extLst>
+  </p:cSld>
+  <p:clrMapOvr>
+    <a:masterClrMapping/>
+  </p:clrMapOvr>
+</p:sld>
+</file>
+
+<file path=ppt/slides/slide49.xml><?xml version="1.0" encoding="utf-8"?>
+<p:sld xmlns:a="http://schemas.openxmlformats.org/drawingml/2006/main" xmlns:r="http://schemas.openxmlformats.org/officeDocument/2006/relationships" xmlns:p="http://schemas.openxmlformats.org/presentationml/2006/main">
+  <p:cSld>
+    <p:spTree>
+      <p:nvGrpSpPr>
+        <p:cNvPr id="1" name=""/>
+        <p:cNvGrpSpPr/>
+        <p:nvPr/>
+      </p:nvGrpSpPr>
+      <p:grpSpPr>
+        <a:xfrm>
+          <a:off x="0" y="0"/>
+          <a:ext cx="0" cy="0"/>
+          <a:chOff x="0" y="0"/>
+          <a:chExt cx="0" cy="0"/>
+        </a:xfrm>
+      </p:grpSpPr>
+      <p:sp>
+        <p:nvSpPr>
+          <p:cNvPr id="2" name="Título 1"/>
+          <p:cNvSpPr>
+            <a:spLocks noGrp="1"/>
+          </p:cNvSpPr>
+          <p:nvPr>
+            <p:ph type="title"/>
+          </p:nvPr>
+        </p:nvSpPr>
+        <p:spPr/>
+        <p:txBody>
+          <a:bodyPr/>
+          <a:lstStyle/>
+          <a:p>
+            <a:endParaRPr lang="es-CL"/>
+          </a:p>
+        </p:txBody>
+      </p:sp>
+      <p:sp>
+        <p:nvSpPr>
+          <p:cNvPr id="3" name="Marcador de contenido 2"/>
+          <p:cNvSpPr>
+            <a:spLocks noGrp="1"/>
+          </p:cNvSpPr>
+          <p:nvPr>
+            <p:ph idx="1"/>
+          </p:nvPr>
+        </p:nvSpPr>
+        <p:spPr/>
+        <p:txBody>
+          <a:bodyPr/>
+          <a:lstStyle/>
+          <a:p>
+            <a:endParaRPr lang="es-CL"/>
+          </a:p>
+        </p:txBody>
+      </p:sp>
+    </p:spTree>
+    <p:extLst>
+      <p:ext uri="{BB962C8B-B14F-4D97-AF65-F5344CB8AC3E}">
+        <p14:creationId xmlns:p14="http://schemas.microsoft.com/office/powerpoint/2010/main" val="203882194"/>
+      </p:ext>
+    </p:extLst>
+  </p:cSld>
+  <p:clrMapOvr>
+    <a:masterClrMapping/>
+  </p:clrMapOvr>
+  <p:timing>
+    <p:tnLst>
+      <p:par>
+        <p:cTn id="1" dur="indefinite" restart="never" nodeType="tmRoot"/>
+      </p:par>
+    </p:tnLst>
+  </p:timing>
+</p:sld>
+</file>
+
+<file path=ppt/slides/slide5.xml><?xml version="1.0" encoding="utf-8"?>
+<p:sld xmlns:a="http://schemas.openxmlformats.org/drawingml/2006/main" xmlns:r="http://schemas.openxmlformats.org/officeDocument/2006/relationships" xmlns:p="http://schemas.openxmlformats.org/presentationml/2006/main">
+  <p:cSld>
+    <p:spTree>
+      <p:nvGrpSpPr>
+        <p:cNvPr id="1" name=""/>
+        <p:cNvGrpSpPr/>
+        <p:nvPr/>
+      </p:nvGrpSpPr>
+      <p:grpSpPr>
+        <a:xfrm>
+          <a:off x="0" y="0"/>
+          <a:ext cx="0" cy="0"/>
+          <a:chOff x="0" y="0"/>
+          <a:chExt cx="0" cy="0"/>
+        </a:xfrm>
+      </p:grpSpPr>
+      <p:sp>
+        <p:nvSpPr>
+          <p:cNvPr id="2" name="Título 1"/>
+          <p:cNvSpPr>
+            <a:spLocks noGrp="1"/>
+          </p:cNvSpPr>
+          <p:nvPr>
+            <p:ph type="title"/>
+          </p:nvPr>
+        </p:nvSpPr>
+        <p:spPr/>
+        <p:txBody>
+          <a:bodyPr/>
+          <a:lstStyle/>
+          <a:p>
+            <a:r>
+              <a:rPr lang="es-CL" dirty="0" err="1" smtClean="0"/>
+              <a:t>Termario</a:t>
+            </a:r>
+            <a:r>
+              <a:rPr lang="es-CL" dirty="0" smtClean="0"/>
+              <a:t> : </a:t>
+            </a:r>
+            <a:r>
+              <a:rPr lang="es-CL" dirty="0"/>
+              <a:t>Unidad </a:t>
+            </a:r>
+            <a:r>
+              <a:rPr lang="es-CL" dirty="0" smtClean="0"/>
+              <a:t>1 - </a:t>
+            </a:r>
+            <a:r>
+              <a:rPr lang="es-CL" dirty="0"/>
+              <a:t>Introducción a la Programación Orientada a Objetos</a:t>
+            </a:r>
+          </a:p>
+        </p:txBody>
+      </p:sp>
+      <p:sp>
+        <p:nvSpPr>
+          <p:cNvPr id="3" name="Marcador de contenido 2"/>
+          <p:cNvSpPr>
+            <a:spLocks noGrp="1"/>
+          </p:cNvSpPr>
+          <p:nvPr>
+            <p:ph idx="1"/>
+          </p:nvPr>
+        </p:nvSpPr>
+        <p:spPr/>
+        <p:txBody>
+          <a:bodyPr>
+            <a:normAutofit lnSpcReduction="10000"/>
+          </a:bodyPr>
+          <a:lstStyle/>
+          <a:p>
+            <a:r>
+              <a:rPr lang="en-US" dirty="0"/>
+              <a:t>1. </a:t>
+            </a:r>
+            <a:r>
+              <a:rPr lang="en-US" dirty="0" err="1"/>
+              <a:t>Introducción</a:t>
+            </a:r>
+            <a:endParaRPr lang="en-US" dirty="0"/>
+          </a:p>
+          <a:p>
+            <a:r>
+              <a:rPr lang="es-ES" dirty="0"/>
+              <a:t>2. Evolución de la </a:t>
+            </a:r>
+            <a:r>
+              <a:rPr lang="es-ES" dirty="0" smtClean="0"/>
+              <a:t>Programación</a:t>
+            </a:r>
+          </a:p>
+          <a:p>
+            <a:r>
+              <a:rPr lang="es-ES" dirty="0"/>
+              <a:t>3. Componentes de la Programación Orientada a </a:t>
+            </a:r>
+            <a:r>
+              <a:rPr lang="es-ES" dirty="0" smtClean="0"/>
+              <a:t>Objetos</a:t>
+            </a:r>
+          </a:p>
+          <a:p>
+            <a:r>
+              <a:rPr lang="es-ES" dirty="0"/>
+              <a:t>4. Propiedades de la Programación Orientada a </a:t>
+            </a:r>
+            <a:r>
+              <a:rPr lang="es-ES" dirty="0" smtClean="0"/>
+              <a:t>Objetos</a:t>
+            </a:r>
+          </a:p>
+          <a:p>
+            <a:r>
+              <a:rPr lang="en-US" dirty="0"/>
+              <a:t>5. </a:t>
+            </a:r>
+            <a:r>
+              <a:rPr lang="en-US" dirty="0" err="1"/>
+              <a:t>Ejemplo</a:t>
+            </a:r>
+            <a:r>
+              <a:rPr lang="en-US" dirty="0"/>
+              <a:t> </a:t>
+            </a:r>
+            <a:r>
+              <a:rPr lang="en-US" dirty="0" err="1" smtClean="0"/>
+              <a:t>Integrador</a:t>
+            </a:r>
+            <a:endParaRPr lang="en-US" dirty="0" smtClean="0"/>
+          </a:p>
+          <a:p>
+            <a:r>
+              <a:rPr lang="es-ES" dirty="0"/>
+              <a:t>6. Buenas Prácticas en Programación Orientada a </a:t>
+            </a:r>
+            <a:r>
+              <a:rPr lang="es-ES" dirty="0" smtClean="0"/>
+              <a:t>Objetos</a:t>
+            </a:r>
+          </a:p>
+          <a:p>
+            <a:r>
+              <a:rPr lang="en-US" dirty="0"/>
+              <a:t>7. </a:t>
+            </a:r>
+            <a:r>
+              <a:rPr lang="en-US" dirty="0" err="1"/>
+              <a:t>Actividades</a:t>
+            </a:r>
+            <a:r>
+              <a:rPr lang="en-US" dirty="0"/>
+              <a:t> </a:t>
+            </a:r>
+            <a:r>
+              <a:rPr lang="en-US" dirty="0" err="1" smtClean="0"/>
+              <a:t>Prácticas</a:t>
+            </a:r>
+            <a:endParaRPr lang="en-US" dirty="0" smtClean="0"/>
+          </a:p>
+          <a:p>
+            <a:r>
+              <a:rPr lang="es-ES" dirty="0"/>
+              <a:t>8. Resumen de la </a:t>
+            </a:r>
+            <a:r>
+              <a:rPr lang="es-ES" dirty="0" smtClean="0"/>
+              <a:t>Unidad</a:t>
+            </a:r>
+          </a:p>
+          <a:p>
+            <a:r>
+              <a:rPr lang="en-US" dirty="0"/>
+              <a:t>9. </a:t>
+            </a:r>
+            <a:r>
+              <a:rPr lang="en-US" dirty="0" err="1"/>
+              <a:t>Evaluación</a:t>
+            </a:r>
+            <a:r>
+              <a:rPr lang="en-US" dirty="0"/>
+              <a:t> </a:t>
+            </a:r>
+            <a:r>
+              <a:rPr lang="en-US" dirty="0" err="1"/>
+              <a:t>Formativa</a:t>
+            </a:r>
+            <a:endParaRPr lang="en-US" dirty="0" smtClean="0"/>
+          </a:p>
+          <a:p>
+            <a:endParaRPr lang="es-CL" dirty="0"/>
+          </a:p>
+        </p:txBody>
+      </p:sp>
+    </p:spTree>
+    <p:extLst>
+      <p:ext uri="{BB962C8B-B14F-4D97-AF65-F5344CB8AC3E}">
+        <p14:creationId xmlns:p14="http://schemas.microsoft.com/office/powerpoint/2010/main" val="47655961"/>
+      </p:ext>
+    </p:extLst>
+  </p:cSld>
+  <p:clrMapOvr>
+    <a:masterClrMapping/>
+  </p:clrMapOvr>
+  <p:timing>
+    <p:tnLst>
+      <p:par>
+        <p:cTn id="1" dur="indefinite" restart="never" nodeType="tmRoot"/>
+      </p:par>
+    </p:tnLst>
+  </p:timing>
+</p:sld>
+</file>
+
+<file path=ppt/slides/slide50.xml><?xml version="1.0" encoding="utf-8"?>
+<p:sld xmlns:a="http://schemas.openxmlformats.org/drawingml/2006/main" xmlns:r="http://schemas.openxmlformats.org/officeDocument/2006/relationships" xmlns:p="http://schemas.openxmlformats.org/presentationml/2006/main">
+  <p:cSld>
+    <p:spTree>
+      <p:nvGrpSpPr>
+        <p:cNvPr id="1" name=""/>
+        <p:cNvGrpSpPr/>
+        <p:nvPr/>
+      </p:nvGrpSpPr>
+      <p:grpSpPr>
+        <a:xfrm>
+          <a:off x="0" y="0"/>
+          <a:ext cx="0" cy="0"/>
+          <a:chOff x="0" y="0"/>
+          <a:chExt cx="0" cy="0"/>
+        </a:xfrm>
+      </p:grpSpPr>
+      <p:sp>
+        <p:nvSpPr>
+          <p:cNvPr id="5" name="Marcador de contenido 4">
+            <a:extLst>
+              <a:ext uri="{FF2B5EF4-FFF2-40B4-BE49-F238E27FC236}">
+                <a16:creationId xmlns:a16="http://schemas.microsoft.com/office/drawing/2014/main" id="{9DD61DCE-439C-8992-2CBC-B9F18BA94FB8}"/>
+              </a:ext>
+            </a:extLst>
+          </p:cNvPr>
+          <p:cNvSpPr>
+            <a:spLocks noGrp="1"/>
+          </p:cNvSpPr>
+          <p:nvPr>
+            <p:ph idx="1"/>
+          </p:nvPr>
+        </p:nvSpPr>
+        <p:spPr/>
+        <p:txBody>
+          <a:bodyPr/>
+          <a:lstStyle/>
+          <a:p>
+            <a:endParaRPr lang="es-CL"/>
+          </a:p>
+        </p:txBody>
+      </p:sp>
+      <p:sp>
+        <p:nvSpPr>
+          <p:cNvPr id="7" name="Título 6">
+            <a:extLst>
+              <a:ext uri="{FF2B5EF4-FFF2-40B4-BE49-F238E27FC236}">
+                <a16:creationId xmlns:a16="http://schemas.microsoft.com/office/drawing/2014/main" id="{6C6AC09E-3440-1040-862D-E5AEDC3994D8}"/>
+              </a:ext>
+            </a:extLst>
+          </p:cNvPr>
+          <p:cNvSpPr>
+            <a:spLocks noGrp="1"/>
+          </p:cNvSpPr>
+          <p:nvPr>
+            <p:ph type="title"/>
+          </p:nvPr>
+        </p:nvSpPr>
+        <p:spPr/>
+        <p:txBody>
+          <a:bodyPr/>
+          <a:lstStyle/>
+          <a:p>
+            <a:endParaRPr lang="es-CL"/>
+          </a:p>
+        </p:txBody>
+      </p:sp>
+    </p:spTree>
+    <p:extLst>
+      <p:ext uri="{BB962C8B-B14F-4D97-AF65-F5344CB8AC3E}">
+        <p14:creationId xmlns:p14="http://schemas.microsoft.com/office/powerpoint/2010/main" val="3300741064"/>
+      </p:ext>
+    </p:extLst>
+  </p:cSld>
+  <p:clrMapOvr>
+    <a:masterClrMapping/>
+  </p:clrMapOvr>
+  <p:timing>
+    <p:tnLst>
+      <p:par>
+        <p:cTn id="1" dur="indefinite" restart="never" nodeType="tmRoot"/>
+      </p:par>
+    </p:tnLst>
+  </p:timing>
+</p:sld>
+</file>
+
+<file path=ppt/slides/slide51.xml><?xml version="1.0" encoding="utf-8"?>
+<p:sld xmlns:a="http://schemas.openxmlformats.org/drawingml/2006/main" xmlns:r="http://schemas.openxmlformats.org/officeDocument/2006/relationships" xmlns:p="http://schemas.openxmlformats.org/presentationml/2006/main">
+  <p:cSld>
+    <p:spTree>
+      <p:nvGrpSpPr>
+        <p:cNvPr id="1" name=""/>
+        <p:cNvGrpSpPr/>
+        <p:nvPr/>
+      </p:nvGrpSpPr>
+      <p:grpSpPr>
+        <a:xfrm>
+          <a:off x="0" y="0"/>
+          <a:ext cx="0" cy="0"/>
+          <a:chOff x="0" y="0"/>
+          <a:chExt cx="0" cy="0"/>
+        </a:xfrm>
+      </p:grpSpPr>
+      <p:sp>
+        <p:nvSpPr>
+          <p:cNvPr id="2" name="Título 1"/>
+          <p:cNvSpPr>
+            <a:spLocks noGrp="1"/>
+          </p:cNvSpPr>
+          <p:nvPr>
+            <p:ph type="title"/>
+          </p:nvPr>
+        </p:nvSpPr>
+        <p:spPr/>
+        <p:txBody>
+          <a:bodyPr/>
+          <a:lstStyle/>
+          <a:p>
+            <a:endParaRPr lang="es-CL"/>
+          </a:p>
+        </p:txBody>
+      </p:sp>
+    </p:spTree>
+    <p:extLst>
+      <p:ext uri="{BB962C8B-B14F-4D97-AF65-F5344CB8AC3E}">
+        <p14:creationId xmlns:p14="http://schemas.microsoft.com/office/powerpoint/2010/main" val="2813096064"/>
+      </p:ext>
+    </p:extLst>
+  </p:cSld>
+  <p:clrMapOvr>
+    <a:masterClrMapping/>
+  </p:clrMapOvr>
+</p:sld>
+</file>
+
+<file path=ppt/slides/slide52.xml><?xml version="1.0" encoding="utf-8"?>
+<p:sld xmlns:a="http://schemas.openxmlformats.org/drawingml/2006/main" xmlns:r="http://schemas.openxmlformats.org/officeDocument/2006/relationships" xmlns:p="http://schemas.openxmlformats.org/presentationml/2006/main">
+  <p:cSld>
+    <p:spTree>
+      <p:nvGrpSpPr>
+        <p:cNvPr id="1" name=""/>
+        <p:cNvGrpSpPr/>
+        <p:nvPr/>
+      </p:nvGrpSpPr>
+      <p:grpSpPr>
+        <a:xfrm>
+          <a:off x="0" y="0"/>
+          <a:ext cx="0" cy="0"/>
+          <a:chOff x="0" y="0"/>
+          <a:chExt cx="0" cy="0"/>
+        </a:xfrm>
+      </p:grpSpPr>
+      <p:sp>
+        <p:nvSpPr>
+          <p:cNvPr id="2" name="Título 1"/>
+          <p:cNvSpPr>
+            <a:spLocks noGrp="1"/>
+          </p:cNvSpPr>
+          <p:nvPr>
+            <p:ph type="title"/>
+          </p:nvPr>
+        </p:nvSpPr>
+        <p:spPr/>
+        <p:txBody>
+          <a:bodyPr/>
+          <a:lstStyle/>
+          <a:p>
             <a:endParaRPr lang="es-CL"/>
           </a:p>
         </p:txBody>
@@ -9775,7 +14204,7 @@
 </p:sld>
 </file>
 
-<file path=ppt/slides/slide41.xml><?xml version="1.0" encoding="utf-8"?>
+<file path=ppt/slides/slide53.xml><?xml version="1.0" encoding="utf-8"?>
 <p:sld xmlns:a="http://schemas.openxmlformats.org/drawingml/2006/main" xmlns:r="http://schemas.openxmlformats.org/officeDocument/2006/relationships" xmlns:p="http://schemas.openxmlformats.org/presentationml/2006/main">
   <p:cSld>
     <p:spTree>
@@ -9855,7 +14284,7 @@
 </p:sld>
 </file>
 
-<file path=ppt/slides/slide42.xml><?xml version="1.0" encoding="utf-8"?>
+<file path=ppt/slides/slide54.xml><?xml version="1.0" encoding="utf-8"?>
 <p:sld xmlns:a="http://schemas.openxmlformats.org/drawingml/2006/main" xmlns:r="http://schemas.openxmlformats.org/officeDocument/2006/relationships" xmlns:p="http://schemas.openxmlformats.org/presentationml/2006/main">
   <p:cSld>
     <p:spTree>
@@ -9885,7 +14314,7 @@
 </p:sld>
 </file>
 
-<file path=ppt/slides/slide43.xml><?xml version="1.0" encoding="utf-8"?>
+<file path=ppt/slides/slide55.xml><?xml version="1.0" encoding="utf-8"?>
 <p:sld xmlns:a="http://schemas.openxmlformats.org/drawingml/2006/main" xmlns:r="http://schemas.openxmlformats.org/officeDocument/2006/relationships" xmlns:p="http://schemas.openxmlformats.org/presentationml/2006/main">
   <p:cSld>
     <p:spTree>
@@ -9990,7 +14419,7 @@
 </p:sld>
 </file>
 
-<file path=ppt/slides/slide44.xml><?xml version="1.0" encoding="utf-8"?>
+<file path=ppt/slides/slide56.xml><?xml version="1.0" encoding="utf-8"?>
 <p:sld xmlns:a="http://schemas.openxmlformats.org/drawingml/2006/main" xmlns:r="http://schemas.openxmlformats.org/officeDocument/2006/relationships" xmlns:p="http://schemas.openxmlformats.org/presentationml/2006/main">
   <p:cSld>
     <p:spTree>
@@ -10095,7 +14524,7 @@
 </p:sld>
 </file>
 
-<file path=ppt/slides/slide45.xml><?xml version="1.0" encoding="utf-8"?>
+<file path=ppt/slides/slide57.xml><?xml version="1.0" encoding="utf-8"?>
 <p:sld xmlns:a="http://schemas.openxmlformats.org/drawingml/2006/main" xmlns:r="http://schemas.openxmlformats.org/officeDocument/2006/relationships" xmlns:p="http://schemas.openxmlformats.org/presentationml/2006/main">
   <p:cSld>
     <p:spTree>
@@ -10150,7 +14579,7 @@
 </p:sld>
 </file>
 
-<file path=ppt/slides/slide46.xml><?xml version="1.0" encoding="utf-8"?>
+<file path=ppt/slides/slide58.xml><?xml version="1.0" encoding="utf-8"?>
 <p:sld xmlns:a="http://schemas.openxmlformats.org/drawingml/2006/main" xmlns:r="http://schemas.openxmlformats.org/officeDocument/2006/relationships" xmlns:p="http://schemas.openxmlformats.org/presentationml/2006/main">
   <p:cSld>
     <p:spTree>
@@ -10205,7 +14634,7 @@
 </p:sld>
 </file>
 
-<file path=ppt/slides/slide47.xml><?xml version="1.0" encoding="utf-8"?>
+<file path=ppt/slides/slide59.xml><?xml version="1.0" encoding="utf-8"?>
 <p:sld xmlns:a="http://schemas.openxmlformats.org/drawingml/2006/main" xmlns:r="http://schemas.openxmlformats.org/officeDocument/2006/relationships" xmlns:p="http://schemas.openxmlformats.org/presentationml/2006/main">
   <p:cSld>
     <p:spTree>
@@ -10260,7 +14689,69 @@
 </p:sld>
 </file>
 
-<file path=ppt/slides/slide48.xml><?xml version="1.0" encoding="utf-8"?>
+<file path=ppt/slides/slide6.xml><?xml version="1.0" encoding="utf-8"?>
+<p:sld xmlns:a="http://schemas.openxmlformats.org/drawingml/2006/main" xmlns:r="http://schemas.openxmlformats.org/officeDocument/2006/relationships" xmlns:p="http://schemas.openxmlformats.org/presentationml/2006/main">
+  <p:cSld>
+    <p:spTree>
+      <p:nvGrpSpPr>
+        <p:cNvPr id="1" name=""/>
+        <p:cNvGrpSpPr/>
+        <p:nvPr/>
+      </p:nvGrpSpPr>
+      <p:grpSpPr>
+        <a:xfrm>
+          <a:off x="0" y="0"/>
+          <a:ext cx="0" cy="0"/>
+          <a:chOff x="0" y="0"/>
+          <a:chExt cx="0" cy="0"/>
+        </a:xfrm>
+      </p:grpSpPr>
+      <p:sp>
+        <p:nvSpPr>
+          <p:cNvPr id="3" name="Título 2">
+            <a:extLst>
+              <a:ext uri="{FF2B5EF4-FFF2-40B4-BE49-F238E27FC236}">
+                <a16:creationId xmlns:a16="http://schemas.microsoft.com/office/drawing/2014/main" id="{31F6D864-4A04-4320-A63A-7CEB9168DABC}"/>
+              </a:ext>
+            </a:extLst>
+          </p:cNvPr>
+          <p:cNvSpPr>
+            <a:spLocks noGrp="1"/>
+          </p:cNvSpPr>
+          <p:nvPr>
+            <p:ph type="title"/>
+          </p:nvPr>
+        </p:nvSpPr>
+        <p:spPr/>
+        <p:txBody>
+          <a:bodyPr/>
+          <a:lstStyle/>
+          <a:p>
+            <a:endParaRPr lang="es-CL"/>
+          </a:p>
+        </p:txBody>
+      </p:sp>
+    </p:spTree>
+    <p:extLst>
+      <p:ext uri="{BB962C8B-B14F-4D97-AF65-F5344CB8AC3E}">
+        <p14:creationId xmlns:p14="http://schemas.microsoft.com/office/powerpoint/2010/main" val="141057398"/>
+      </p:ext>
+    </p:extLst>
+  </p:cSld>
+  <p:clrMapOvr>
+    <a:masterClrMapping/>
+  </p:clrMapOvr>
+  <p:timing>
+    <p:tnLst>
+      <p:par>
+        <p:cTn id="1" dur="indefinite" restart="never" nodeType="tmRoot"/>
+      </p:par>
+    </p:tnLst>
+  </p:timing>
+</p:sld>
+</file>
+
+<file path=ppt/slides/slide60.xml><?xml version="1.0" encoding="utf-8"?>
 <p:sld xmlns:a="http://schemas.openxmlformats.org/drawingml/2006/main" xmlns:r="http://schemas.openxmlformats.org/officeDocument/2006/relationships" xmlns:p="http://schemas.openxmlformats.org/presentationml/2006/main">
   <p:cSld>
     <p:bg>
@@ -10329,7 +14820,7 @@
 </p:sld>
 </file>
 
-<file path=ppt/slides/slide49.xml><?xml version="1.0" encoding="utf-8"?>
+<file path=ppt/slides/slide61.xml><?xml version="1.0" encoding="utf-8"?>
 <p:sld xmlns:a="http://schemas.openxmlformats.org/drawingml/2006/main" xmlns:r="http://schemas.openxmlformats.org/officeDocument/2006/relationships" xmlns:p="http://schemas.openxmlformats.org/presentationml/2006/main">
   <p:cSld>
     <p:spTree>
@@ -10384,221 +14875,7 @@
 </p:sld>
 </file>
 
-<file path=ppt/slides/slide5.xml><?xml version="1.0" encoding="utf-8"?>
-<p:sld xmlns:a="http://schemas.openxmlformats.org/drawingml/2006/main" xmlns:r="http://schemas.openxmlformats.org/officeDocument/2006/relationships" xmlns:p="http://schemas.openxmlformats.org/presentationml/2006/main">
-  <p:cSld>
-    <p:spTree>
-      <p:nvGrpSpPr>
-        <p:cNvPr id="1" name=""/>
-        <p:cNvGrpSpPr/>
-        <p:nvPr/>
-      </p:nvGrpSpPr>
-      <p:grpSpPr>
-        <a:xfrm>
-          <a:off x="0" y="0"/>
-          <a:ext cx="0" cy="0"/>
-          <a:chOff x="0" y="0"/>
-          <a:chExt cx="0" cy="0"/>
-        </a:xfrm>
-      </p:grpSpPr>
-      <p:sp>
-        <p:nvSpPr>
-          <p:cNvPr id="2" name="Título 1"/>
-          <p:cNvSpPr>
-            <a:spLocks noGrp="1"/>
-          </p:cNvSpPr>
-          <p:nvPr>
-            <p:ph type="title"/>
-          </p:nvPr>
-        </p:nvSpPr>
-        <p:spPr/>
-        <p:txBody>
-          <a:bodyPr/>
-          <a:lstStyle/>
-          <a:p>
-            <a:r>
-              <a:rPr lang="es-CL" dirty="0" err="1" smtClean="0"/>
-              <a:t>Termario</a:t>
-            </a:r>
-            <a:r>
-              <a:rPr lang="es-CL" dirty="0" smtClean="0"/>
-              <a:t> : </a:t>
-            </a:r>
-            <a:r>
-              <a:rPr lang="es-CL" dirty="0"/>
-              <a:t>Unidad </a:t>
-            </a:r>
-            <a:r>
-              <a:rPr lang="es-CL" dirty="0" smtClean="0"/>
-              <a:t>1 - </a:t>
-            </a:r>
-            <a:r>
-              <a:rPr lang="es-CL" dirty="0"/>
-              <a:t>Introducción a la Programación Orientada a Objetos</a:t>
-            </a:r>
-          </a:p>
-        </p:txBody>
-      </p:sp>
-      <p:sp>
-        <p:nvSpPr>
-          <p:cNvPr id="3" name="Marcador de contenido 2"/>
-          <p:cNvSpPr>
-            <a:spLocks noGrp="1"/>
-          </p:cNvSpPr>
-          <p:nvPr>
-            <p:ph idx="1"/>
-          </p:nvPr>
-        </p:nvSpPr>
-        <p:spPr/>
-        <p:txBody>
-          <a:bodyPr>
-            <a:normAutofit lnSpcReduction="10000"/>
-          </a:bodyPr>
-          <a:lstStyle/>
-          <a:p>
-            <a:r>
-              <a:rPr lang="en-US" dirty="0"/>
-              <a:t>1. </a:t>
-            </a:r>
-            <a:r>
-              <a:rPr lang="en-US" dirty="0" err="1"/>
-              <a:t>Introducción</a:t>
-            </a:r>
-            <a:endParaRPr lang="en-US" dirty="0"/>
-          </a:p>
-          <a:p>
-            <a:r>
-              <a:rPr lang="es-ES" dirty="0"/>
-              <a:t>2. Evolución de la </a:t>
-            </a:r>
-            <a:r>
-              <a:rPr lang="es-ES" dirty="0" smtClean="0"/>
-              <a:t>Programación</a:t>
-            </a:r>
-          </a:p>
-          <a:p>
-            <a:r>
-              <a:rPr lang="es-ES" dirty="0"/>
-              <a:t>3. Componentes de la Programación Orientada a </a:t>
-            </a:r>
-            <a:r>
-              <a:rPr lang="es-ES" dirty="0" smtClean="0"/>
-              <a:t>Objetos</a:t>
-            </a:r>
-          </a:p>
-          <a:p>
-            <a:r>
-              <a:rPr lang="es-ES" dirty="0"/>
-              <a:t>4. Propiedades de la Programación Orientada a </a:t>
-            </a:r>
-            <a:r>
-              <a:rPr lang="es-ES" dirty="0" smtClean="0"/>
-              <a:t>Objetos</a:t>
-            </a:r>
-          </a:p>
-          <a:p>
-            <a:r>
-              <a:rPr lang="en-US" dirty="0"/>
-              <a:t>5. </a:t>
-            </a:r>
-            <a:r>
-              <a:rPr lang="en-US" dirty="0" err="1"/>
-              <a:t>Ejemplo</a:t>
-            </a:r>
-            <a:r>
-              <a:rPr lang="en-US" dirty="0"/>
-              <a:t> </a:t>
-            </a:r>
-            <a:r>
-              <a:rPr lang="en-US" dirty="0" err="1" smtClean="0"/>
-              <a:t>Integrador</a:t>
-            </a:r>
-            <a:endParaRPr lang="en-US" dirty="0" smtClean="0"/>
-          </a:p>
-          <a:p>
-            <a:r>
-              <a:rPr lang="es-ES" dirty="0"/>
-              <a:t>6. Buenas Prácticas en Programación Orientada a </a:t>
-            </a:r>
-            <a:r>
-              <a:rPr lang="es-ES" dirty="0" smtClean="0"/>
-              <a:t>Objetos</a:t>
-            </a:r>
-          </a:p>
-          <a:p>
-            <a:r>
-              <a:rPr lang="en-US" dirty="0"/>
-              <a:t>7. </a:t>
-            </a:r>
-            <a:r>
-              <a:rPr lang="en-US" dirty="0" err="1"/>
-              <a:t>Actividades</a:t>
-            </a:r>
-            <a:r>
-              <a:rPr lang="en-US" dirty="0"/>
-              <a:t> </a:t>
-            </a:r>
-            <a:r>
-              <a:rPr lang="en-US" dirty="0" err="1" smtClean="0"/>
-              <a:t>Prácticas</a:t>
-            </a:r>
-            <a:endParaRPr lang="en-US" dirty="0" smtClean="0"/>
-          </a:p>
-          <a:p>
-            <a:r>
-              <a:rPr lang="es-ES" dirty="0"/>
-              <a:t>8. Resumen de la </a:t>
-            </a:r>
-            <a:r>
-              <a:rPr lang="es-ES" dirty="0" smtClean="0"/>
-              <a:t>Unidad</a:t>
-            </a:r>
-          </a:p>
-          <a:p>
-            <a:r>
-              <a:rPr lang="en-US" dirty="0"/>
-              <a:t>9. </a:t>
-            </a:r>
-            <a:r>
-              <a:rPr lang="en-US" dirty="0" err="1"/>
-              <a:t>Evaluación</a:t>
-            </a:r>
-            <a:r>
-              <a:rPr lang="en-US" dirty="0"/>
-              <a:t> </a:t>
-            </a:r>
-            <a:r>
-              <a:rPr lang="en-US" dirty="0" err="1"/>
-              <a:t>Formativa</a:t>
-            </a:r>
-            <a:endParaRPr lang="en-US" dirty="0" smtClean="0"/>
-          </a:p>
-          <a:p>
-            <a:endParaRPr lang="es-CL" dirty="0"/>
-          </a:p>
-        </p:txBody>
-      </p:sp>
-    </p:spTree>
-    <p:extLst>
-      <p:ext uri="{BB962C8B-B14F-4D97-AF65-F5344CB8AC3E}">
-        <p14:creationId xmlns:p14="http://schemas.microsoft.com/office/powerpoint/2010/main" val="47655961"/>
-      </p:ext>
-    </p:extLst>
-  </p:cSld>
-  <p:clrMapOvr>
-    <a:masterClrMapping/>
-  </p:clrMapOvr>
-  <p:timing>
-    <p:tnLst>
-      <p:par>
-        <p:cTn id="1" dur="indefinite" restart="never" nodeType="tmRoot"/>
-      </p:par>
-    </p:tnLst>
-  </p:timing>
-</p:sld>
-</file>
-
-<file path=ppt/slides/slide50.xml><?xml version="1.0" encoding="utf-8"?>
+<file path=ppt/slides/slide62.xml><?xml version="1.0" encoding="utf-8"?>
 <p:sld xmlns:a="http://schemas.openxmlformats.org/drawingml/2006/main" xmlns:r="http://schemas.openxmlformats.org/officeDocument/2006/relationships" xmlns:p="http://schemas.openxmlformats.org/presentationml/2006/main">
   <p:cSld>
     <p:spTree>
@@ -10650,68 +14927,6 @@
   <p:clrMapOvr>
     <a:masterClrMapping/>
   </p:clrMapOvr>
-</p:sld>
-</file>
-
-<file path=ppt/slides/slide6.xml><?xml version="1.0" encoding="utf-8"?>
-<p:sld xmlns:a="http://schemas.openxmlformats.org/drawingml/2006/main" xmlns:r="http://schemas.openxmlformats.org/officeDocument/2006/relationships" xmlns:p="http://schemas.openxmlformats.org/presentationml/2006/main">
-  <p:cSld>
-    <p:spTree>
-      <p:nvGrpSpPr>
-        <p:cNvPr id="1" name=""/>
-        <p:cNvGrpSpPr/>
-        <p:nvPr/>
-      </p:nvGrpSpPr>
-      <p:grpSpPr>
-        <a:xfrm>
-          <a:off x="0" y="0"/>
-          <a:ext cx="0" cy="0"/>
-          <a:chOff x="0" y="0"/>
-          <a:chExt cx="0" cy="0"/>
-        </a:xfrm>
-      </p:grpSpPr>
-      <p:sp>
-        <p:nvSpPr>
-          <p:cNvPr id="3" name="Título 2">
-            <a:extLst>
-              <a:ext uri="{FF2B5EF4-FFF2-40B4-BE49-F238E27FC236}">
-                <a16:creationId xmlns:a16="http://schemas.microsoft.com/office/drawing/2014/main" id="{31F6D864-4A04-4320-A63A-7CEB9168DABC}"/>
-              </a:ext>
-            </a:extLst>
-          </p:cNvPr>
-          <p:cNvSpPr>
-            <a:spLocks noGrp="1"/>
-          </p:cNvSpPr>
-          <p:nvPr>
-            <p:ph type="title"/>
-          </p:nvPr>
-        </p:nvSpPr>
-        <p:spPr/>
-        <p:txBody>
-          <a:bodyPr/>
-          <a:lstStyle/>
-          <a:p>
-            <a:endParaRPr lang="es-CL"/>
-          </a:p>
-        </p:txBody>
-      </p:sp>
-    </p:spTree>
-    <p:extLst>
-      <p:ext uri="{BB962C8B-B14F-4D97-AF65-F5344CB8AC3E}">
-        <p14:creationId xmlns:p14="http://schemas.microsoft.com/office/powerpoint/2010/main" val="141057398"/>
-      </p:ext>
-    </p:extLst>
-  </p:cSld>
-  <p:clrMapOvr>
-    <a:masterClrMapping/>
-  </p:clrMapOvr>
-  <p:timing>
-    <p:tnLst>
-      <p:par>
-        <p:cTn id="1" dur="indefinite" restart="never" nodeType="tmRoot"/>
-      </p:par>
-    </p:tnLst>
-  </p:timing>
 </p:sld>
 </file>
 
